--- a/labs/lab09/slides/slides.pptx
+++ b/labs/lab09/slides/slides.pptx
@@ -5,7 +5,7 @@
     <p:sldMasterId id="2147483696" r:id="rId1"/>
   </p:sldMasterIdLst>
   <p:notesMasterIdLst>
-    <p:notesMasterId r:id="rId17"/>
+    <p:notesMasterId r:id="rId31"/>
   </p:notesMasterIdLst>
   <p:sldIdLst>
     <p:sldId id="256" r:id="rId2"/>
@@ -23,6 +23,20 @@
     <p:sldId id="268" r:id="rId14"/>
     <p:sldId id="269" r:id="rId15"/>
     <p:sldId id="270" r:id="rId16"/>
+    <p:sldId id="271" r:id="rId17"/>
+    <p:sldId id="272" r:id="rId18"/>
+    <p:sldId id="273" r:id="rId19"/>
+    <p:sldId id="274" r:id="rId20"/>
+    <p:sldId id="275" r:id="rId21"/>
+    <p:sldId id="276" r:id="rId22"/>
+    <p:sldId id="277" r:id="rId23"/>
+    <p:sldId id="278" r:id="rId24"/>
+    <p:sldId id="279" r:id="rId25"/>
+    <p:sldId id="280" r:id="rId26"/>
+    <p:sldId id="281" r:id="rId27"/>
+    <p:sldId id="282" r:id="rId28"/>
+    <p:sldId id="283" r:id="rId29"/>
+    <p:sldId id="284" r:id="rId30"/>
   </p:sldIdLst>
   <p:sldSz cx="12192000" cy="6858000"/>
   <p:notesSz cx="6858000" cy="9144000"/>
@@ -527,7 +541,7 @@
             </a:pPr>
             <a:r>
               <a:rPr/>
-              <a:t>This lab turns earlier search and data work into a coherent project plan. Ask students to keep the worksheet, codebook, dataset, and Zotero collection open.</a:t>
+              <a:t>Use Superman for the statistics-selection quiz, then return to the project dataset selected earlier. Keep your project’s codebook, the Lab 09 Analysis Proposal worksheet, and your Zotero collection open. The simple guides demonstrate the tests with other datasets; use your own project variables when planning an analysis.</a:t>
             </a:r>
           </a:p>
         </p:txBody>
@@ -609,7 +623,7 @@
             </a:pPr>
             <a:r>
               <a:rPr/>
-              <a:t>The worksheet’s source sections are meant to support the rationale, not merely prove that three PDFs were located.</a:t>
+              <a:t>Use the Superman definitions on the preceding slides. Let students make their choices before checking. Discuss why the selected descriptive statistics fit the variable type.</a:t>
             </a:r>
           </a:p>
         </p:txBody>
@@ -631,7 +645,7 @@
           <a:p>
             <a:fld id="{18BDFEC3-8487-43E8-A154-7C12CBC1FFF2}" type="slidenum">
               <a:rPr lang="en-US"/>
-              <a:t>11</a:t>
+              <a:t>14</a:t>
             </a:fld>
             <a:endParaRPr lang="en-US"/>
           </a:p>
@@ -691,7 +705,7 @@
             </a:pPr>
             <a:r>
               <a:rPr/>
-              <a:t>Carry forward the validity distinctions from Labs 3 and 4. Students should not turn an association in a cited article into a causal project prediction.</a:t>
+              <a:t>Use the Superman definitions on the preceding slides. Let students make their choices before checking. Discuss why the selected descriptive statistics fit the variable type.</a:t>
             </a:r>
           </a:p>
         </p:txBody>
@@ -713,7 +727,7 @@
           <a:p>
             <a:fld id="{18BDFEC3-8487-43E8-A154-7C12CBC1FFF2}" type="slidenum">
               <a:rPr lang="en-US"/>
-              <a:t>12</a:t>
+              <a:t>17</a:t>
             </a:fld>
             <a:endParaRPr lang="en-US"/>
           </a:p>
@@ -773,7 +787,7 @@
             </a:pPr>
             <a:r>
               <a:rPr/>
-              <a:t>If several hypotheses are minor variations of the same analysis, revise the set. The project should test a coherent but informative set of relationships.</a:t>
+              <a:t>Keep all three analyses distinct. The checker rejects an incorrect variable type, pairing a variable with itself, and repeated pairs. Reversing a correlation, chi-square, or within-groups pair repeats the same analysis.</a:t>
             </a:r>
           </a:p>
         </p:txBody>
@@ -795,7 +809,7 @@
           <a:p>
             <a:fld id="{18BDFEC3-8487-43E8-A154-7C12CBC1FFF2}" type="slidenum">
               <a:rPr lang="en-US"/>
-              <a:t>13</a:t>
+              <a:t>19</a:t>
             </a:fld>
             <a:endParaRPr lang="en-US"/>
           </a:p>
@@ -855,7 +869,7 @@
             </a:pPr>
             <a:r>
               <a:rPr/>
-              <a:t>The TA should not need to open the codebook to understand a hypothesis. At the same time, exact field names prevent ambiguity when the analysis begins.</a:t>
+              <a:t>The practice set has two binary variables, so it has one distinct chi-square pair. Reversing the variables gives the same analysis. This is a test-selection question; the small dataset does not establish that a chi-square approximation is suitable. Check expected cell counts before any inference.</a:t>
             </a:r>
           </a:p>
         </p:txBody>
@@ -877,7 +891,7 @@
           <a:p>
             <a:fld id="{18BDFEC3-8487-43E8-A154-7C12CBC1FFF2}" type="slidenum">
               <a:rPr lang="en-US"/>
-              <a:t>14</a:t>
+              <a:t>21</a:t>
             </a:fld>
             <a:endParaRPr lang="en-US"/>
           </a:p>
@@ -937,7 +951,7 @@
             </a:pPr>
             <a:r>
               <a:rPr/>
-              <a:t>Use the worksheet point values as the final checklist. Ask whether another researcher could understand the plan without opening the dataset. This completed preproposal becomes the plan for later analysis and writing labs.</a:t>
+              <a:t>Keep all three analyses distinct. The checker rejects an incorrect variable type, pairing a variable with itself, and repeated pairs. Reversing a correlation, chi-square, or within-groups pair repeats the same analysis.</a:t>
             </a:r>
           </a:p>
         </p:txBody>
@@ -959,7 +973,417 @@
           <a:p>
             <a:fld id="{18BDFEC3-8487-43E8-A154-7C12CBC1FFF2}" type="slidenum">
               <a:rPr lang="en-US"/>
-              <a:t>15</a:t>
+              <a:t>23</a:t>
+            </a:fld>
+            <a:endParaRPr lang="en-US"/>
+          </a:p>
+        </p:txBody>
+      </p:sp>
+    </p:spTree>
+  </p:cSld>
+</p:notes>
+</file>
+
+<file path=ppt/notesSlides/notesSlide15.xml><?xml version="1.0" encoding="utf-8"?>
+<p:notes xmlns:a="http://schemas.openxmlformats.org/drawingml/2006/main" xmlns:r="http://schemas.openxmlformats.org/officeDocument/2006/relationships" xmlns:p="http://schemas.openxmlformats.org/presentationml/2006/main">
+  <p:cSld>
+    <p:spTree>
+      <p:nvGrpSpPr>
+        <p:cNvPr id="1" name=""/>
+        <p:cNvGrpSpPr/>
+        <p:nvPr/>
+      </p:nvGrpSpPr>
+      <p:grpSpPr>
+        <a:xfrm>
+          <a:off x="0" y="0"/>
+          <a:ext cx="0" cy="0"/>
+          <a:chOff x="0" y="0"/>
+          <a:chExt cx="0" cy="0"/>
+        </a:xfrm>
+      </p:grpSpPr>
+      <p:sp>
+        <p:nvSpPr>
+          <p:cNvPr id="2" name="Slide Image Placeholder 1"/>
+          <p:cNvSpPr>
+            <a:spLocks noGrp="1" noRot="1" noChangeAspect="1"/>
+          </p:cNvSpPr>
+          <p:nvPr>
+            <p:ph type="sldImg"/>
+          </p:nvPr>
+        </p:nvSpPr>
+        <p:spPr/>
+      </p:sp>
+      <p:sp>
+        <p:nvSpPr>
+          <p:cNvPr id="3" name="Notes Placeholder 2"/>
+          <p:cNvSpPr>
+            <a:spLocks noGrp="1"/>
+          </p:cNvSpPr>
+          <p:nvPr>
+            <p:ph type="body" idx="1"/>
+          </p:nvPr>
+        </p:nvSpPr>
+        <p:spPr/>
+        <p:txBody>
+          <a:bodyPr/>
+          <a:lstStyle/>
+          <a:p>
+            <a:pPr lvl="0" indent="0" marL="0">
+              <a:buNone/>
+            </a:pPr>
+            <a:r>
+              <a:rPr/>
+              <a:t>Students should pair the two actor heights and pair the two approval scores, in either order. The checker rejects a height paired with an approval score, as well as self-pairs and duplicate pairs. Ask what each mean difference would describe; scale compatibility alone does not establish a useful hypothesis or satisfy the test’s assumptions.</a:t>
+            </a:r>
+          </a:p>
+        </p:txBody>
+      </p:sp>
+      <p:sp>
+        <p:nvSpPr>
+          <p:cNvPr id="4" name="Slide Number Placeholder 3"/>
+          <p:cNvSpPr>
+            <a:spLocks noGrp="1"/>
+          </p:cNvSpPr>
+          <p:nvPr>
+            <p:ph type="sldNum" sz="quarter" idx="10"/>
+          </p:nvPr>
+        </p:nvSpPr>
+        <p:spPr/>
+        <p:txBody>
+          <a:bodyPr/>
+          <a:lstStyle/>
+          <a:p>
+            <a:fld id="{18BDFEC3-8487-43E8-A154-7C12CBC1FFF2}" type="slidenum">
+              <a:rPr lang="en-US"/>
+              <a:t>25</a:t>
+            </a:fld>
+            <a:endParaRPr lang="en-US"/>
+          </a:p>
+        </p:txBody>
+      </p:sp>
+    </p:spTree>
+  </p:cSld>
+</p:notes>
+</file>
+
+<file path=ppt/notesSlides/notesSlide16.xml><?xml version="1.0" encoding="utf-8"?>
+<p:notes xmlns:a="http://schemas.openxmlformats.org/drawingml/2006/main" xmlns:r="http://schemas.openxmlformats.org/officeDocument/2006/relationships" xmlns:p="http://schemas.openxmlformats.org/presentationml/2006/main">
+  <p:cSld>
+    <p:spTree>
+      <p:nvGrpSpPr>
+        <p:cNvPr id="1" name=""/>
+        <p:cNvGrpSpPr/>
+        <p:nvPr/>
+      </p:nvGrpSpPr>
+      <p:grpSpPr>
+        <a:xfrm>
+          <a:off x="0" y="0"/>
+          <a:ext cx="0" cy="0"/>
+          <a:chOff x="0" y="0"/>
+          <a:chExt cx="0" cy="0"/>
+        </a:xfrm>
+      </p:grpSpPr>
+      <p:sp>
+        <p:nvSpPr>
+          <p:cNvPr id="2" name="Slide Image Placeholder 1"/>
+          <p:cNvSpPr>
+            <a:spLocks noGrp="1" noRot="1" noChangeAspect="1"/>
+          </p:cNvSpPr>
+          <p:nvPr>
+            <p:ph type="sldImg"/>
+          </p:nvPr>
+        </p:nvSpPr>
+        <p:spPr/>
+      </p:sp>
+      <p:sp>
+        <p:nvSpPr>
+          <p:cNvPr id="3" name="Notes Placeholder 2"/>
+          <p:cNvSpPr>
+            <a:spLocks noGrp="1"/>
+          </p:cNvSpPr>
+          <p:nvPr>
+            <p:ph type="body" idx="1"/>
+          </p:nvPr>
+        </p:nvSpPr>
+        <p:spPr/>
+        <p:txBody>
+          <a:bodyPr/>
+          <a:lstStyle/>
+          <a:p>
+            <a:pPr lvl="0" indent="0" marL="0">
+              <a:buNone/>
+            </a:pPr>
+            <a:r>
+              <a:rPr/>
+              <a:t>Use the wording for the selected test in the handouts. State which mean should be higher, the direction of a correlation, or the categorical pattern expected. Base the prediction on prior work and a reasoned explanation before checking the inferential result. Students should write their own four hypotheses.</a:t>
+            </a:r>
+          </a:p>
+        </p:txBody>
+      </p:sp>
+      <p:sp>
+        <p:nvSpPr>
+          <p:cNvPr id="4" name="Slide Number Placeholder 3"/>
+          <p:cNvSpPr>
+            <a:spLocks noGrp="1"/>
+          </p:cNvSpPr>
+          <p:nvPr>
+            <p:ph type="sldNum" sz="quarter" idx="10"/>
+          </p:nvPr>
+        </p:nvSpPr>
+        <p:spPr/>
+        <p:txBody>
+          <a:bodyPr/>
+          <a:lstStyle/>
+          <a:p>
+            <a:fld id="{18BDFEC3-8487-43E8-A154-7C12CBC1FFF2}" type="slidenum">
+              <a:rPr lang="en-US"/>
+              <a:t>26</a:t>
+            </a:fld>
+            <a:endParaRPr lang="en-US"/>
+          </a:p>
+        </p:txBody>
+      </p:sp>
+    </p:spTree>
+  </p:cSld>
+</p:notes>
+</file>
+
+<file path=ppt/notesSlides/notesSlide17.xml><?xml version="1.0" encoding="utf-8"?>
+<p:notes xmlns:a="http://schemas.openxmlformats.org/drawingml/2006/main" xmlns:r="http://schemas.openxmlformats.org/officeDocument/2006/relationships" xmlns:p="http://schemas.openxmlformats.org/presentationml/2006/main">
+  <p:cSld>
+    <p:spTree>
+      <p:nvGrpSpPr>
+        <p:cNvPr id="1" name=""/>
+        <p:cNvGrpSpPr/>
+        <p:nvPr/>
+      </p:nvGrpSpPr>
+      <p:grpSpPr>
+        <a:xfrm>
+          <a:off x="0" y="0"/>
+          <a:ext cx="0" cy="0"/>
+          <a:chOff x="0" y="0"/>
+          <a:chExt cx="0" cy="0"/>
+        </a:xfrm>
+      </p:grpSpPr>
+      <p:sp>
+        <p:nvSpPr>
+          <p:cNvPr id="2" name="Slide Image Placeholder 1"/>
+          <p:cNvSpPr>
+            <a:spLocks noGrp="1" noRot="1" noChangeAspect="1"/>
+          </p:cNvSpPr>
+          <p:nvPr>
+            <p:ph type="sldImg"/>
+          </p:nvPr>
+        </p:nvSpPr>
+        <p:spPr/>
+      </p:sp>
+      <p:sp>
+        <p:nvSpPr>
+          <p:cNvPr id="3" name="Notes Placeholder 2"/>
+          <p:cNvSpPr>
+            <a:spLocks noGrp="1"/>
+          </p:cNvSpPr>
+          <p:nvPr>
+            <p:ph type="body" idx="1"/>
+          </p:nvPr>
+        </p:nvSpPr>
+        <p:spPr/>
+        <p:txBody>
+          <a:bodyPr/>
+          <a:lstStyle/>
+          <a:p>
+            <a:pPr lvl="0" indent="0" marL="0">
+              <a:buNone/>
+            </a:pPr>
+            <a:r>
+              <a:rPr/>
+              <a:t>The worksheet requires at least three peer-reviewed journal articles and one summary table for each. Include independent, dependent, or control variables as appropriate. Record the in-text citation in the field provided. Brief notes or bullets are sufficient for the relevance field; read the articles themselves before summarizing them.</a:t>
+            </a:r>
+          </a:p>
+        </p:txBody>
+      </p:sp>
+      <p:sp>
+        <p:nvSpPr>
+          <p:cNvPr id="4" name="Slide Number Placeholder 3"/>
+          <p:cNvSpPr>
+            <a:spLocks noGrp="1"/>
+          </p:cNvSpPr>
+          <p:nvPr>
+            <p:ph type="sldNum" sz="quarter" idx="10"/>
+          </p:nvPr>
+        </p:nvSpPr>
+        <p:spPr/>
+        <p:txBody>
+          <a:bodyPr/>
+          <a:lstStyle/>
+          <a:p>
+            <a:fld id="{18BDFEC3-8487-43E8-A154-7C12CBC1FFF2}" type="slidenum">
+              <a:rPr lang="en-US"/>
+              <a:t>27</a:t>
+            </a:fld>
+            <a:endParaRPr lang="en-US"/>
+          </a:p>
+        </p:txBody>
+      </p:sp>
+    </p:spTree>
+  </p:cSld>
+</p:notes>
+</file>
+
+<file path=ppt/notesSlides/notesSlide18.xml><?xml version="1.0" encoding="utf-8"?>
+<p:notes xmlns:a="http://schemas.openxmlformats.org/drawingml/2006/main" xmlns:r="http://schemas.openxmlformats.org/officeDocument/2006/relationships" xmlns:p="http://schemas.openxmlformats.org/presentationml/2006/main">
+  <p:cSld>
+    <p:spTree>
+      <p:nvGrpSpPr>
+        <p:cNvPr id="1" name=""/>
+        <p:cNvGrpSpPr/>
+        <p:nvPr/>
+      </p:nvGrpSpPr>
+      <p:grpSpPr>
+        <a:xfrm>
+          <a:off x="0" y="0"/>
+          <a:ext cx="0" cy="0"/>
+          <a:chOff x="0" y="0"/>
+          <a:chExt cx="0" cy="0"/>
+        </a:xfrm>
+      </p:grpSpPr>
+      <p:sp>
+        <p:nvSpPr>
+          <p:cNvPr id="2" name="Slide Image Placeholder 1"/>
+          <p:cNvSpPr>
+            <a:spLocks noGrp="1" noRot="1" noChangeAspect="1"/>
+          </p:cNvSpPr>
+          <p:nvPr>
+            <p:ph type="sldImg"/>
+          </p:nvPr>
+        </p:nvSpPr>
+        <p:spPr/>
+      </p:sp>
+      <p:sp>
+        <p:nvSpPr>
+          <p:cNvPr id="3" name="Notes Placeholder 2"/>
+          <p:cNvSpPr>
+            <a:spLocks noGrp="1"/>
+          </p:cNvSpPr>
+          <p:nvPr>
+            <p:ph type="body" idx="1"/>
+          </p:nvPr>
+        </p:nvSpPr>
+        <p:spPr/>
+        <p:txBody>
+          <a:bodyPr/>
+          <a:lstStyle/>
+          <a:p>
+            <a:pPr lvl="0" indent="0" marL="0">
+              <a:buNone/>
+            </a:pPr>
+            <a:r>
+              <a:rPr/>
+              <a:t>A source can support more than one hypothesis. Explain the connection in the worksheet’s relevance field rather than claiming an article supports a prediction simply because it mentions the same topic. Keep claims within the study’s design: an association alone does not show that one variable causes another.</a:t>
+            </a:r>
+          </a:p>
+        </p:txBody>
+      </p:sp>
+      <p:sp>
+        <p:nvSpPr>
+          <p:cNvPr id="4" name="Slide Number Placeholder 3"/>
+          <p:cNvSpPr>
+            <a:spLocks noGrp="1"/>
+          </p:cNvSpPr>
+          <p:nvPr>
+            <p:ph type="sldNum" sz="quarter" idx="10"/>
+          </p:nvPr>
+        </p:nvSpPr>
+        <p:spPr/>
+        <p:txBody>
+          <a:bodyPr/>
+          <a:lstStyle/>
+          <a:p>
+            <a:fld id="{18BDFEC3-8487-43E8-A154-7C12CBC1FFF2}" type="slidenum">
+              <a:rPr lang="en-US"/>
+              <a:t>28</a:t>
+            </a:fld>
+            <a:endParaRPr lang="en-US"/>
+          </a:p>
+        </p:txBody>
+      </p:sp>
+    </p:spTree>
+  </p:cSld>
+</p:notes>
+</file>
+
+<file path=ppt/notesSlides/notesSlide19.xml><?xml version="1.0" encoding="utf-8"?>
+<p:notes xmlns:a="http://schemas.openxmlformats.org/drawingml/2006/main" xmlns:r="http://schemas.openxmlformats.org/officeDocument/2006/relationships" xmlns:p="http://schemas.openxmlformats.org/presentationml/2006/main">
+  <p:cSld>
+    <p:spTree>
+      <p:nvGrpSpPr>
+        <p:cNvPr id="1" name=""/>
+        <p:cNvGrpSpPr/>
+        <p:nvPr/>
+      </p:nvGrpSpPr>
+      <p:grpSpPr>
+        <a:xfrm>
+          <a:off x="0" y="0"/>
+          <a:ext cx="0" cy="0"/>
+          <a:chOff x="0" y="0"/>
+          <a:chExt cx="0" cy="0"/>
+        </a:xfrm>
+      </p:grpSpPr>
+      <p:sp>
+        <p:nvSpPr>
+          <p:cNvPr id="2" name="Slide Image Placeholder 1"/>
+          <p:cNvSpPr>
+            <a:spLocks noGrp="1" noRot="1" noChangeAspect="1"/>
+          </p:cNvSpPr>
+          <p:nvPr>
+            <p:ph type="sldImg"/>
+          </p:nvPr>
+        </p:nvSpPr>
+        <p:spPr/>
+      </p:sp>
+      <p:sp>
+        <p:nvSpPr>
+          <p:cNvPr id="3" name="Notes Placeholder 2"/>
+          <p:cNvSpPr>
+            <a:spLocks noGrp="1"/>
+          </p:cNvSpPr>
+          <p:nvPr>
+            <p:ph type="body" idx="1"/>
+          </p:nvPr>
+        </p:nvSpPr>
+        <p:spPr/>
+        <p:txBody>
+          <a:bodyPr/>
+          <a:lstStyle/>
+          <a:p>
+            <a:pPr lvl="0" indent="0" marL="0">
+              <a:buNone/>
+            </a:pPr>
+            <a:r>
+              <a:rPr/>
+              <a:t>The sign-off requirement comes from the lab schedule. Review any grouping decisions and confirm that each test fits its hypothesis before proceeding. The quiz offers practice choosing statistics; it does not check an individual student’s project proposal. This worksheet does not request a checker screenshot.</a:t>
+            </a:r>
+          </a:p>
+        </p:txBody>
+      </p:sp>
+      <p:sp>
+        <p:nvSpPr>
+          <p:cNvPr id="4" name="Slide Number Placeholder 3"/>
+          <p:cNvSpPr>
+            <a:spLocks noGrp="1"/>
+          </p:cNvSpPr>
+          <p:nvPr>
+            <p:ph type="sldNum" sz="quarter" idx="10"/>
+          </p:nvPr>
+        </p:nvSpPr>
+        <p:spPr/>
+        <p:txBody>
+          <a:bodyPr/>
+          <a:lstStyle/>
+          <a:p>
+            <a:fld id="{18BDFEC3-8487-43E8-A154-7C12CBC1FFF2}" type="slidenum">
+              <a:rPr lang="en-US"/>
+              <a:t>29</a:t>
             </a:fld>
             <a:endParaRPr lang="en-US"/>
           </a:p>
@@ -1019,7 +1443,7 @@
             </a:pPr>
             <a:r>
               <a:rPr/>
-              <a:t>The worksheet is not a list of interesting variables. The variables, hypotheses, and references should form one connected argument.</a:t>
+              <a:t>Start with the construct and dataset chosen for the earlier preproposal. Each of the four hypotheses pairs the core variable with one other variable. Explain what each variable measures, using the codebook. The two bonus variables are optional.</a:t>
             </a:r>
           </a:p>
         </p:txBody>
@@ -1101,7 +1525,7 @@
             </a:pPr>
             <a:r>
               <a:rPr/>
-              <a:t>The image is an example of moving from a recognizable behavior or context to a measurable construct. Students’ own projects may use a different dataset.</a:t>
+              <a:t>The duck image illustrates why a number needs a clear meaning; it is not a validated measure. Use the codebook and SPSS Variable View to check labels, category codes, and missing values. Complete the variable-type choices in the worksheet before planning a recode.</a:t>
             </a:r>
           </a:p>
         </p:txBody>
@@ -1183,7 +1607,7 @@
             </a:pPr>
             <a:r>
               <a:rPr/>
-              <a:t>Do this before recoding or writing hypotheses. A project built on mislabeled categories or undeclared missing codes will produce misleading results later.</a:t>
+              <a:t>The worksheet requires selecting or recoding qualitative variables with three or more groups into two groups. This is the assignment’s restriction, not a general rule for research. Explain why the grouping suits the hypothesis and literature. Pay attention to what is lost when categories are combined, especially demographic categories.</a:t>
             </a:r>
           </a:p>
         </p:txBody>
@@ -1265,7 +1689,7 @@
             </a:pPr>
             <a:r>
               <a:rPr/>
-              <a:t>Students should preserve the source variable and save syntax. Each transformation must serve a stated project decision, not merely simplify the output.</a:t>
+              <a:t>These are the four choices in the worksheet. Variable type alone does not distinguish correlation from within-groups ANOVA: ask whether the hypothesis concerns an association or a difference between paired means. A paired mean comparison also needs scores on a meaningfully comparable scale. Confirm the choice with your TA.</a:t>
             </a:r>
           </a:p>
         </p:txBody>
@@ -1347,7 +1771,7 @@
             </a:pPr>
             <a:r>
               <a:rPr/>
-              <a:t>The worksheet requires four core-variable relationships, with optional bonus hypotheses. Avoid vague wording such as “will be related.”</a:t>
+              <a:t>Use the same Superman file supplied in Lab 07, not the separate Superman SMES dataset. This activity asks students to identify variable types and choose analyses; it does not require running the tests. Numeric category codes do not make a variable quantitative. The quiz uses shorter labels such as Clark group and Clark height.</a:t>
             </a:r>
           </a:p>
         </p:txBody>
@@ -1369,7 +1793,7 @@
           <a:p>
             <a:fld id="{18BDFEC3-8487-43E8-A154-7C12CBC1FFF2}" type="slidenum">
               <a:rPr lang="en-US"/>
-              <a:t>7</a:t>
+              <a:t>8</a:t>
             </a:fld>
             <a:endParaRPr lang="en-US"/>
           </a:p>
@@ -1429,7 +1853,7 @@
             </a:pPr>
             <a:r>
               <a:rPr/>
-              <a:t>The wording should reveal the planned analysis. Students should be able to infer variable types from the hypothesis sentence. Any qualitative variable with three or more groups must be selected or recoded into two groups.</a:t>
+              <a:t>This illustration comes from Lab 02. Both height variables in this quiz use inches. Use the values in the Superman download; do not round them to whole inches. Each row records a Superman portrayal entry, and blank SPSS cells are missing, not zero.</a:t>
             </a:r>
           </a:p>
         </p:txBody>
@@ -1451,7 +1875,7 @@
           <a:p>
             <a:fld id="{18BDFEC3-8487-43E8-A154-7C12CBC1FFF2}" type="slidenum">
               <a:rPr lang="en-US"/>
-              <a:t>8</a:t>
+              <a:t>9</a:t>
             </a:fld>
             <a:endParaRPr lang="en-US"/>
           </a:p>
@@ -1511,7 +1935,7 @@
             </a:pPr>
             <a:r>
               <a:rPr/>
-              <a:t>Students may inspect distributions to verify data quality, but the substantive direction should be justified independently of the observed inferential result.</a:t>
+              <a:t>The image identifies the critics percentage. Its example values are retained from Lab 02 and are not a replacement for the supplied data. Keep the approval score distinct from the Tomatometer category in the earlier definition table.</a:t>
             </a:r>
           </a:p>
         </p:txBody>
@@ -1533,7 +1957,7 @@
           <a:p>
             <a:fld id="{18BDFEC3-8487-43E8-A154-7C12CBC1FFF2}" type="slidenum">
               <a:rPr lang="en-US"/>
-              <a:t>9</a:t>
+              <a:t>10</a:t>
             </a:fld>
             <a:endParaRPr lang="en-US"/>
           </a:p>
@@ -1593,7 +2017,7 @@
             </a:pPr>
             <a:r>
               <a:rPr/>
-              <a:t>One source may support more than one hypothesis, but each citation must have a clear role. Encourage precise claims rather than broad “research shows” statements.</a:t>
+              <a:t>Heights and approval scores are paired within each row. The critics and audience scores use the same 0–100 range. Choosing a test does not establish independence or satisfy its other assumptions; this quiz stops at choosing variables and comparisons.</a:t>
             </a:r>
           </a:p>
         </p:txBody>
@@ -1615,7 +2039,7 @@
           <a:p>
             <a:fld id="{18BDFEC3-8487-43E8-A154-7C12CBC1FFF2}" type="slidenum">
               <a:rPr lang="en-US"/>
-              <a:t>10</a:t>
+              <a:t>11</a:t>
             </a:fld>
             <a:endParaRPr lang="en-US"/>
           </a:p>
@@ -2884,8 +3308,8 @@
         </p:nvSpPr>
         <p:spPr>
           <a:xfrm>
-            <a:off x="1583436" y="2313433"/>
-            <a:ext cx="4270248" cy="704087"/>
+            <a:off x="1097280" y="2313433"/>
+            <a:ext cx="4907280" cy="548640"/>
           </a:xfrm>
         </p:spPr>
         <p:txBody>
@@ -2957,8 +3381,8 @@
         </p:nvSpPr>
         <p:spPr>
           <a:xfrm>
-            <a:off x="1583436" y="3143250"/>
-            <a:ext cx="4270248" cy="2596776"/>
+            <a:off x="1097280" y="2926080"/>
+            <a:ext cx="4907280" cy="3177540"/>
           </a:xfrm>
         </p:spPr>
         <p:txBody>
@@ -3014,8 +3438,8 @@
         </p:nvSpPr>
         <p:spPr>
           <a:xfrm>
-            <a:off x="6338316" y="3143250"/>
-            <a:ext cx="4253484" cy="2596776"/>
+            <a:off x="6187440" y="2926080"/>
+            <a:ext cx="4907280" cy="3177540"/>
           </a:xfrm>
         </p:spPr>
         <p:txBody>
@@ -3075,8 +3499,8 @@
         </p:nvSpPr>
         <p:spPr>
           <a:xfrm>
-            <a:off x="6338316" y="2313433"/>
-            <a:ext cx="4270248" cy="704087"/>
+            <a:off x="6187440" y="2313433"/>
+            <a:ext cx="4907280" cy="548640"/>
           </a:xfrm>
         </p:spPr>
         <p:txBody>
@@ -3211,7 +3635,12 @@
             <p:ph type="title"/>
           </p:nvPr>
         </p:nvSpPr>
-        <p:spPr/>
+        <p:spPr>
+          <a:xfrm>
+            <a:off x="1097280" y="964692"/>
+            <a:ext cx="9997440" cy="1188720"/>
+          </a:xfrm>
+        </p:spPr>
         <p:txBody>
           <a:bodyPr/>
           <a:lstStyle/>
@@ -4807,7 +5236,7 @@
             </a:pPr>
             <a:r>
               <a:rPr/>
-              <a:t>Build the Preproposal</a:t>
+              <a:t>Build the Analysis Proposal</a:t>
             </a:r>
           </a:p>
         </p:txBody>
@@ -4896,19 +5325,49 @@
             </a:pPr>
             <a:r>
               <a:rPr/>
-              <a:t>9 Link each RH to evidence</a:t>
-            </a:r>
-          </a:p>
-        </p:txBody>
-      </p:sp>
-      <p:sp>
-        <p:nvSpPr>
-          <p:cNvPr id="3" name="Content Placeholder 2"/>
-          <p:cNvSpPr>
-            <a:spLocks noGrp="1"/>
-          </p:cNvSpPr>
-          <p:nvPr>
-            <p:ph idx="1" sz="half"/>
+              <a:t>8 Read the critics score</a:t>
+            </a:r>
+          </a:p>
+        </p:txBody>
+      </p:sp>
+      <p:pic>
+        <p:nvPicPr>
+          <p:cNvPr descr="Lab 02 filmstrip illustration highlighting Rotten Tomatoes critics percentages with yellow circles, distinct from the audience percentages beside them" id="0" name="Picture 1"/>
+          <p:cNvPicPr>
+            <a:picLocks noGrp="1" noChangeAspect="1"/>
+          </p:cNvPicPr>
+          <p:nvPr/>
+        </p:nvPicPr>
+        <p:blipFill>
+          <a:blip r:embed="rId3"/>
+          <a:stretch>
+            <a:fillRect/>
+          </a:stretch>
+        </p:blipFill>
+        <p:spPr bwMode="auto">
+          <a:xfrm>
+            <a:off x="1993900" y="2628900"/>
+            <a:ext cx="3098800" cy="3098800"/>
+          </a:xfrm>
+          <a:prstGeom prst="rect">
+            <a:avLst/>
+          </a:prstGeom>
+          <a:noFill/>
+          <a:ln w="9525">
+            <a:noFill/>
+            <a:headEnd/>
+            <a:tailEnd/>
+          </a:ln>
+        </p:spPr>
+      </p:pic>
+      <p:sp>
+        <p:nvSpPr>
+          <p:cNvPr id="4" name="Content Placeholder 3"/>
+          <p:cNvSpPr>
+            <a:spLocks noGrp="1"/>
+          </p:cNvSpPr>
+          <p:nvPr>
+            <p:ph idx="2" sz="half"/>
           </p:nvPr>
         </p:nvSpPr>
         <p:spPr/>
@@ -4920,70 +5379,46 @@
               <a:buNone/>
             </a:pPr>
             <a:r>
+              <a:rPr>
+                <a:latin typeface="Courier"/>
+              </a:rPr>
+              <a:t>rt_critics_score</a:t>
+            </a:r>
+          </a:p>
+          <a:p>
+            <a:pPr lvl="0" indent="0" marL="0">
+              <a:buNone/>
+            </a:pPr>
+            <a:r>
+              <a:rPr b="1"/>
+              <a:t>Description</a:t>
+            </a:r>
+          </a:p>
+          <a:p>
+            <a:pPr lvl="0" indent="0" marL="0">
+              <a:buNone/>
+            </a:pPr>
+            <a:r>
               <a:rPr/>
-              <a:t>For every hypothesis, ask:</a:t>
-            </a:r>
-          </a:p>
-          <a:p>
-            <a:pPr lvl="0"/>
+              <a:t>Rotten Tomatoes critics approval score, 0–100</a:t>
+            </a:r>
+          </a:p>
+          <a:p>
+            <a:pPr lvl="0" indent="0" marL="0">
+              <a:buNone/>
+            </a:pPr>
             <a:r>
               <a:rPr/>
-              <a:t>Which article supports the direction?</a:t>
-            </a:r>
-          </a:p>
-          <a:p>
-            <a:pPr lvl="0"/>
+              <a:t>[Quiz label: Critics score]</a:t>
+            </a:r>
+          </a:p>
+          <a:p>
+            <a:pPr lvl="0" indent="0" marL="0">
+              <a:buNone/>
+            </a:pPr>
             <a:r>
               <a:rPr/>
-              <a:t>Does it study the same construct?</a:t>
-            </a:r>
-          </a:p>
-          <a:p>
-            <a:pPr lvl="0"/>
-            <a:r>
-              <a:rPr/>
-              <a:t>What differs in sample, setting, or measure?</a:t>
-            </a:r>
-          </a:p>
-          <a:p>
-            <a:pPr lvl="0"/>
-            <a:r>
-              <a:rPr/>
-              <a:t>What inference can it actually support?</a:t>
-            </a:r>
-          </a:p>
-        </p:txBody>
-      </p:sp>
-      <p:sp>
-        <p:nvSpPr>
-          <p:cNvPr id="4" name="Content Placeholder 3"/>
-          <p:cNvSpPr>
-            <a:spLocks noGrp="1"/>
-          </p:cNvSpPr>
-          <p:nvPr>
-            <p:ph idx="2" sz="half"/>
-          </p:nvPr>
-        </p:nvSpPr>
-        <p:spPr/>
-        <p:txBody>
-          <a:bodyPr/>
-          <a:lstStyle/>
-          <a:p>
-            <a:pPr lvl="0" indent="0" marL="0">
-              <a:buNone/>
-            </a:pPr>
-            <a:r>
-              <a:rPr b="1"/>
-              <a:t>Evidence chain</a:t>
-            </a:r>
-          </a:p>
-          <a:p>
-            <a:pPr lvl="0" indent="0" marL="0">
-              <a:buNone/>
-            </a:pPr>
-            <a:r>
-              <a:rPr/>
-              <a:t>Article finding ↓ Conceptual rationale ↓ Directional RH</a:t>
+              <a:t>Lab 02 illustration; use the download for data values</a:t>
             </a:r>
           </a:p>
         </p:txBody>
@@ -5035,14 +5470,14 @@
             </a:pPr>
             <a:r>
               <a:rPr/>
-              <a:t>10 Use three empirical sources well</a:t>
+              <a:t>9 Read the audience score</a:t>
             </a:r>
           </a:p>
         </p:txBody>
       </p:sp>
       <p:pic>
         <p:nvPicPr>
-          <p:cNvPr descr="A poll asking researchers to choose standard response wording, illustrating that measurement decisions must be documented precisely" id="0" name="Picture 1"/>
+          <p:cNvPr descr="Lab 02 filmstrip illustration highlighting Rotten Tomatoes audience percentages beside popcorn symbols, distinct from the critics percentages beside them" id="0" name="Picture 1"/>
           <p:cNvPicPr>
             <a:picLocks noGrp="1" noChangeAspect="1"/>
           </p:cNvPicPr>
@@ -5056,8 +5491,8 @@
         </p:blipFill>
         <p:spPr bwMode="auto">
           <a:xfrm>
-            <a:off x="1447800" y="2628900"/>
-            <a:ext cx="4178300" cy="3098800"/>
+            <a:off x="1993900" y="2628900"/>
+            <a:ext cx="3098800" cy="3098800"/>
           </a:xfrm>
           <a:prstGeom prst="rect">
             <a:avLst/>
@@ -5089,53 +5524,46 @@
               <a:buNone/>
             </a:pPr>
             <a:r>
+              <a:rPr>
+                <a:latin typeface="Courier"/>
+              </a:rPr>
+              <a:t>rt_audience_score</a:t>
+            </a:r>
+          </a:p>
+          <a:p>
+            <a:pPr lvl="0" indent="0" marL="0">
+              <a:buNone/>
+            </a:pPr>
+            <a:r>
+              <a:rPr b="1"/>
+              <a:t>Description</a:t>
+            </a:r>
+          </a:p>
+          <a:p>
+            <a:pPr lvl="0" indent="0" marL="0">
+              <a:buNone/>
+            </a:pPr>
+            <a:r>
               <a:rPr/>
-              <a:t>For each reference, record:</a:t>
-            </a:r>
-          </a:p>
-          <a:p>
-            <a:pPr lvl="0" indent="-457200" marL="457200">
-              <a:buAutoNum type="arabicPeriod"/>
+              <a:t>Rotten Tomatoes audience approval score, 0–100</a:t>
+            </a:r>
+          </a:p>
+          <a:p>
+            <a:pPr lvl="0" indent="0" marL="0">
+              <a:buNone/>
             </a:pPr>
             <a:r>
               <a:rPr/>
-              <a:t>full APA citation</a:t>
-            </a:r>
-          </a:p>
-          <a:p>
-            <a:pPr lvl="0" indent="-457200" marL="457200">
-              <a:buAutoNum type="arabicPeriod"/>
+              <a:t>[Quiz label: Audience score]</a:t>
+            </a:r>
+          </a:p>
+          <a:p>
+            <a:pPr lvl="0" indent="0" marL="0">
+              <a:buNone/>
             </a:pPr>
             <a:r>
               <a:rPr/>
-              <a:t>research question or hypothesis</a:t>
-            </a:r>
-          </a:p>
-          <a:p>
-            <a:pPr lvl="0" indent="-457200" marL="457200">
-              <a:buAutoNum type="arabicPeriod"/>
-            </a:pPr>
-            <a:r>
-              <a:rPr/>
-              <a:t>sample and design</a:t>
-            </a:r>
-          </a:p>
-          <a:p>
-            <a:pPr lvl="0" indent="-457200" marL="457200">
-              <a:buAutoNum type="arabicPeriod"/>
-            </a:pPr>
-            <a:r>
-              <a:rPr/>
-              <a:t>key finding</a:t>
-            </a:r>
-          </a:p>
-          <a:p>
-            <a:pPr lvl="0" indent="-457200" marL="457200">
-              <a:buAutoNum type="arabicPeriod"/>
-            </a:pPr>
-            <a:r>
-              <a:rPr/>
-              <a:t>connection to the project</a:t>
+              <a:t>Lab 02 illustration; use the download for data values</a:t>
             </a:r>
           </a:p>
         </p:txBody>
@@ -5187,136 +5615,32 @@
             </a:pPr>
             <a:r>
               <a:rPr/>
-              <a:t>11 Keep claims within the design</a:t>
-            </a:r>
-          </a:p>
-        </p:txBody>
-      </p:sp>
-      <p:sp>
-        <p:nvSpPr>
-          <p:cNvPr id="1001" name="box-box" descr="box: . Cause requires adequate assignment and control."/>
-          <p:cNvSpPr/>
-          <p:nvPr/>
-        </p:nvSpPr>
-        <p:spPr>
-          <a:xfrm>
-            <a:off x="1097280" y="2633472"/>
-            <a:ext cx="9994392" cy="670560"/>
-          </a:xfrm>
-          <a:prstGeom prst="roundRect">
-            <a:avLst>
-              <a:gd name="adj" fmla="val 6000"/>
-            </a:avLst>
-          </a:prstGeom>
-          <a:solidFill>
-            <a:srgbClr val="E6E6E6"/>
-          </a:solidFill>
-          <a:ln w="19050">
-            <a:solidFill>
-              <a:srgbClr val="CCCCCC"/>
-            </a:solidFill>
-          </a:ln>
-        </p:spPr>
-        <p:txBody>
-          <a:bodyPr lIns="182880" tIns="182880" rIns="182880" bIns="182880" anchor="t" wrap="square">
-            <a:normAutofit/>
-          </a:bodyPr>
-          <a:lstStyle/>
-          <a:p>
-            <a:pPr algn="l"/>
-            <a:r>
-              <a:rPr lang="en-US" sz="2000" b="0" dirty="0">
-                <a:solidFill>
-                  <a:srgbClr val="010B13"/>
-                </a:solidFill>
-              </a:rPr>
-              <a:t>Cause requires adequate assignment and control.</a:t>
-            </a:r>
-          </a:p>
-        </p:txBody>
-      </p:sp>
-      <p:sp>
-        <p:nvSpPr>
-          <p:cNvPr id="1002" name="box-cream-box" descr="box: . Association matches observational evidence."/>
-          <p:cNvSpPr/>
-          <p:nvPr/>
-        </p:nvSpPr>
-        <p:spPr>
-          <a:xfrm>
-            <a:off x="1097280" y="3450336"/>
-            <a:ext cx="9994392" cy="670560"/>
-          </a:xfrm>
-          <a:prstGeom prst="roundRect">
-            <a:avLst>
-              <a:gd name="adj" fmla="val 6000"/>
-            </a:avLst>
-          </a:prstGeom>
-          <a:solidFill>
-            <a:srgbClr val="F5F1E7"/>
-          </a:solidFill>
-          <a:ln w="19050">
-            <a:solidFill>
-              <a:srgbClr val="CCCCCC"/>
-            </a:solidFill>
-          </a:ln>
-        </p:spPr>
-        <p:txBody>
-          <a:bodyPr lIns="182880" tIns="182880" rIns="182880" bIns="182880" anchor="t" wrap="square">
-            <a:normAutofit/>
-          </a:bodyPr>
-          <a:lstStyle/>
-          <a:p>
-            <a:pPr algn="l"/>
-            <a:r>
-              <a:rPr lang="en-US" sz="2000" b="0" dirty="0">
-                <a:solidFill>
-                  <a:srgbClr val="010B13"/>
-                </a:solidFill>
-              </a:rPr>
-              <a:t>Association matches observational evidence.</a:t>
-            </a:r>
-          </a:p>
-        </p:txBody>
-      </p:sp>
-      <p:sp>
-        <p:nvSpPr>
-          <p:cNvPr id="1003" name="box-yellow-box" descr="box: . Generalization must match the sample and setting."/>
-          <p:cNvSpPr/>
-          <p:nvPr/>
-        </p:nvSpPr>
-        <p:spPr>
-          <a:xfrm>
-            <a:off x="1097280" y="4267200"/>
-            <a:ext cx="9994392" cy="670560"/>
-          </a:xfrm>
-          <a:prstGeom prst="roundRect">
-            <a:avLst>
-              <a:gd name="adj" fmla="val 6000"/>
-            </a:avLst>
-          </a:prstGeom>
-          <a:solidFill>
-            <a:srgbClr val="FFD74F"/>
-          </a:solidFill>
-          <a:ln w="19050">
-            <a:solidFill>
-              <a:srgbClr val="CCCCCC"/>
-            </a:solidFill>
-          </a:ln>
-        </p:spPr>
-        <p:txBody>
-          <a:bodyPr lIns="182880" tIns="182880" rIns="182880" bIns="182880" anchor="t" wrap="square">
-            <a:normAutofit/>
-          </a:bodyPr>
-          <a:lstStyle/>
-          <a:p>
-            <a:pPr algn="l"/>
-            <a:r>
-              <a:rPr lang="en-US" sz="2000" b="0" dirty="0">
-                <a:solidFill>
-                  <a:srgbClr val="010B13"/>
-                </a:solidFill>
-              </a:rPr>
-              <a:t>Generalization must match the sample and setting.</a:t>
+              <a:t>10 Classify the practice variables</a:t>
+            </a:r>
+          </a:p>
+        </p:txBody>
+      </p:sp>
+      <p:sp>
+        <p:nvSpPr>
+          <p:cNvPr id="3" name="Content Placeholder 2"/>
+          <p:cNvSpPr>
+            <a:spLocks noGrp="1"/>
+          </p:cNvSpPr>
+          <p:nvPr>
+            <p:ph idx="1"/>
+          </p:nvPr>
+        </p:nvSpPr>
+        <p:spPr/>
+        <p:txBody>
+          <a:bodyPr/>
+          <a:lstStyle/>
+          <a:p>
+            <a:pPr lvl="0" indent="0" marL="0">
+              <a:buNone/>
+            </a:pPr>
+            <a:r>
+              <a:rPr/>
+              <a:t>For each variable, choose its type and descriptive statistics</a:t>
             </a:r>
           </a:p>
         </p:txBody>
@@ -5368,98 +5692,231 @@
             </a:pPr>
             <a:r>
               <a:rPr/>
-              <a:t>12 Check the four-RH set</a:t>
-            </a:r>
-          </a:p>
-        </p:txBody>
-      </p:sp>
-      <p:pic>
-        <p:nvPicPr>
-          <p:cNvPr descr="A grid of contestants with different attributes, illustrating a coherent set of distinct comparisons around one central outcome" id="0" name="Picture 1"/>
-          <p:cNvPicPr>
-            <a:picLocks noGrp="1" noChangeAspect="1"/>
-          </p:cNvPicPr>
-          <p:nvPr/>
-        </p:nvPicPr>
-        <p:blipFill>
-          <a:blip r:embed="rId3"/>
-          <a:stretch>
-            <a:fillRect/>
-          </a:stretch>
-        </p:blipFill>
-        <p:spPr bwMode="auto">
-          <a:xfrm>
-            <a:off x="1282700" y="2628900"/>
-            <a:ext cx="4521200" cy="3098800"/>
-          </a:xfrm>
-          <a:prstGeom prst="rect">
-            <a:avLst/>
-          </a:prstGeom>
-          <a:noFill/>
-          <a:ln w="9525">
-            <a:noFill/>
-            <a:headEnd/>
-            <a:tailEnd/>
-          </a:ln>
-        </p:spPr>
-      </p:pic>
-      <p:sp>
-        <p:nvSpPr>
-          <p:cNvPr id="4" name="Content Placeholder 3"/>
-          <p:cNvSpPr>
-            <a:spLocks noGrp="1"/>
-          </p:cNvSpPr>
-          <p:nvPr>
-            <p:ph idx="2" sz="half"/>
-          </p:nvPr>
-        </p:nvSpPr>
-        <p:spPr/>
-        <p:txBody>
-          <a:bodyPr/>
-          <a:lstStyle/>
-          <a:p>
-            <a:pPr lvl="0" indent="0" marL="0">
-              <a:buNone/>
-            </a:pPr>
-            <a:r>
-              <a:rPr/>
-              <a:t>Together, the hypotheses should be:</a:t>
-            </a:r>
-          </a:p>
-          <a:p>
-            <a:pPr lvl="0"/>
-            <a:r>
-              <a:rPr b="1"/>
-              <a:t>distinct</a:t>
-            </a:r>
-            <a:r>
-              <a:rPr/>
-              <a:t>, not repetitive</a:t>
-            </a:r>
-          </a:p>
-          <a:p>
-            <a:pPr lvl="0"/>
-            <a:r>
-              <a:rPr/>
-              <a:t>feasible with available variables</a:t>
-            </a:r>
-          </a:p>
-          <a:p>
-            <a:pPr lvl="0"/>
-            <a:r>
-              <a:rPr/>
-              <a:t>interpretable with the planned coding</a:t>
-            </a:r>
-          </a:p>
-          <a:p>
-            <a:pPr lvl="0"/>
-            <a:r>
-              <a:rPr/>
-              <a:t>supported by the selected literature</a:t>
-            </a:r>
-          </a:p>
-        </p:txBody>
-      </p:sp>
+              <a:t>10 Classify the practice variables (continued)</a:t>
+            </a:r>
+          </a:p>
+        </p:txBody>
+      </p:sp>
+      <p:graphicFrame>
+        <p:nvGraphicFramePr>
+          <p:cNvPr id="6" name="Content Placeholder 5"/>
+          <p:cNvGraphicFramePr>
+            <a:graphicFrameLocks noGrp="1"/>
+          </p:cNvGraphicFramePr>
+          <p:nvPr>
+            <p:ph idx="1"/>
+          </p:nvPr>
+        </p:nvGraphicFramePr>
+        <p:xfrm>
+          <a:off x="1092200" y="2628900"/>
+          <a:ext cx="9994900" cy="3098800"/>
+        </p:xfrm>
+        <a:graphic>
+          <a:graphicData uri="http://schemas.openxmlformats.org/drawingml/2006/table">
+            <a:tbl>
+              <a:tblPr firstRow="1" bandRow="1">
+                <a:tableStyleId>{5C22544A-7EE6-4342-B048-85BDC9FD1C3A}</a:tableStyleId>
+              </a:tblPr>
+              <a:tblGrid>
+                <a:gridCol w="3327400"/>
+                <a:gridCol w="3327400"/>
+                <a:gridCol w="3327400"/>
+              </a:tblGrid>
+              <a:tr h="0">
+                <a:tc>
+                  <a:txBody>
+                    <a:bodyPr/>
+                    <a:lstStyle/>
+                    <a:p>
+                      <a:pPr lvl="0" indent="0" marL="0">
+                        <a:buNone/>
+                      </a:pPr>
+                      <a:r>
+                        <a:rPr/>
+                        <a:t>Variable</a:t>
+                      </a:r>
+                    </a:p>
+                  </a:txBody>
+                  <a:tcPr/>
+                </a:tc>
+                <a:tc>
+                  <a:txBody>
+                    <a:bodyPr/>
+                    <a:lstStyle/>
+                    <a:p>
+                      <a:pPr lvl="0" indent="0" marL="0">
+                        <a:buNone/>
+                      </a:pPr>
+                      <a:r>
+                        <a:rPr/>
+                        <a:t>Type</a:t>
+                      </a:r>
+                    </a:p>
+                  </a:txBody>
+                  <a:tcPr/>
+                </a:tc>
+                <a:tc>
+                  <a:txBody>
+                    <a:bodyPr/>
+                    <a:lstStyle/>
+                    <a:p>
+                      <a:pPr lvl="0" indent="0" marL="0">
+                        <a:buNone/>
+                      </a:pPr>
+                      <a:r>
+                        <a:rPr/>
+                        <a:t>Descriptive statistics</a:t>
+                      </a:r>
+                    </a:p>
+                  </a:txBody>
+                  <a:tcPr/>
+                </a:tc>
+              </a:tr>
+              <a:tr h="0">
+                <a:tc>
+                  <a:txBody>
+                    <a:bodyPr/>
+                    <a:lstStyle/>
+                    <a:p>
+                      <a:pPr lvl="0" indent="0" marL="0">
+                        <a:buNone/>
+                      </a:pPr>
+                      <a:r>
+                        <a:rPr/>
+                        <a:t>clark_grp</a:t>
+                      </a:r>
+                    </a:p>
+                  </a:txBody>
+                </a:tc>
+                <a:tc>
+                  <a:txBody>
+                    <a:bodyPr/>
+                    <a:lstStyle/>
+                    <a:p>
+                      <a:pPr lvl="0" indent="0" marL="0">
+                        <a:buNone/>
+                      </a:pPr>
+                      <a:r>
+                        <a:rPr/>
+                        <a:t>______</a:t>
+                      </a:r>
+                    </a:p>
+                  </a:txBody>
+                </a:tc>
+                <a:tc>
+                  <a:txBody>
+                    <a:bodyPr/>
+                    <a:lstStyle/>
+                    <a:p>
+                      <a:pPr lvl="0" indent="0" marL="0">
+                        <a:buNone/>
+                      </a:pPr>
+                      <a:r>
+                        <a:rPr/>
+                        <a:t>______</a:t>
+                      </a:r>
+                    </a:p>
+                  </a:txBody>
+                </a:tc>
+              </a:tr>
+              <a:tr h="0">
+                <a:tc>
+                  <a:txBody>
+                    <a:bodyPr/>
+                    <a:lstStyle/>
+                    <a:p>
+                      <a:pPr lvl="0" indent="0" marL="0">
+                        <a:buNone/>
+                      </a:pPr>
+                      <a:r>
+                        <a:rPr/>
+                        <a:t>tomatometer</a:t>
+                      </a:r>
+                    </a:p>
+                  </a:txBody>
+                </a:tc>
+                <a:tc>
+                  <a:txBody>
+                    <a:bodyPr/>
+                    <a:lstStyle/>
+                    <a:p>
+                      <a:pPr lvl="0" indent="0" marL="0">
+                        <a:buNone/>
+                      </a:pPr>
+                      <a:r>
+                        <a:rPr/>
+                        <a:t>______</a:t>
+                      </a:r>
+                    </a:p>
+                  </a:txBody>
+                </a:tc>
+                <a:tc>
+                  <a:txBody>
+                    <a:bodyPr/>
+                    <a:lstStyle/>
+                    <a:p>
+                      <a:pPr lvl="0" indent="0" marL="0">
+                        <a:buNone/>
+                      </a:pPr>
+                      <a:r>
+                        <a:rPr/>
+                        <a:t>______</a:t>
+                      </a:r>
+                    </a:p>
+                  </a:txBody>
+                </a:tc>
+              </a:tr>
+              <a:tr h="0">
+                <a:tc>
+                  <a:txBody>
+                    <a:bodyPr/>
+                    <a:lstStyle/>
+                    <a:p>
+                      <a:pPr lvl="0" indent="0" marL="0">
+                        <a:buNone/>
+                      </a:pPr>
+                      <a:r>
+                        <a:rPr/>
+                        <a:t>clark_height_in</a:t>
+                      </a:r>
+                    </a:p>
+                  </a:txBody>
+                </a:tc>
+                <a:tc>
+                  <a:txBody>
+                    <a:bodyPr/>
+                    <a:lstStyle/>
+                    <a:p>
+                      <a:pPr lvl="0" indent="0" marL="0">
+                        <a:buNone/>
+                      </a:pPr>
+                      <a:r>
+                        <a:rPr/>
+                        <a:t>______</a:t>
+                      </a:r>
+                    </a:p>
+                  </a:txBody>
+                </a:tc>
+                <a:tc>
+                  <a:txBody>
+                    <a:bodyPr/>
+                    <a:lstStyle/>
+                    <a:p>
+                      <a:pPr lvl="0" indent="0" marL="0">
+                        <a:buNone/>
+                      </a:pPr>
+                      <a:r>
+                        <a:rPr/>
+                        <a:t>______</a:t>
+                      </a:r>
+                    </a:p>
+                  </a:txBody>
+                </a:tc>
+              </a:tr>
+            </a:tbl>
+          </a:graphicData>
+        </a:graphic>
+      </p:graphicFrame>
     </p:spTree>
   </p:cSld>
 </p:sld>
@@ -5507,89 +5964,32 @@
             </a:pPr>
             <a:r>
               <a:rPr/>
-              <a:t>13 Make the worksheet self-contained</a:t>
-            </a:r>
-          </a:p>
-        </p:txBody>
-      </p:sp>
-      <p:sp>
-        <p:nvSpPr>
-          <p:cNvPr id="1004" name="prose" descr=""/>
-          <p:cNvSpPr/>
-          <p:nvPr/>
-        </p:nvSpPr>
-        <p:spPr>
-          <a:xfrm>
-            <a:off x="1097280" y="2633472"/>
-            <a:ext cx="9994392" cy="609600"/>
-          </a:xfrm>
-          <a:prstGeom prst="roundRect">
-            <a:avLst>
-              <a:gd name="adj" fmla="val 6000"/>
-            </a:avLst>
-          </a:prstGeom>
-          <a:noFill/>
-          <a:ln>
-            <a:noFill/>
-          </a:ln>
-        </p:spPr>
-        <p:txBody>
-          <a:bodyPr lIns="182880" tIns="182880" rIns="182880" bIns="182880" anchor="t" wrap="square">
-            <a:normAutofit/>
-          </a:bodyPr>
-          <a:lstStyle/>
-          <a:p>
-            <a:pPr algn="l"/>
-            <a:r>
-              <a:rPr lang="en-US" sz="2000" b="0" dirty="0">
-                <a:solidFill>
-                  <a:srgbClr val="010B13"/>
-                </a:solidFill>
-              </a:rPr>
-              <a:t>Use exact variable names where requested, but explain them in ordinary language.</a:t>
-            </a:r>
-          </a:p>
-        </p:txBody>
-      </p:sp>
-      <p:sp>
-        <p:nvSpPr>
-          <p:cNvPr id="1005" name="box-box" descr="box: . Dataset field: var_name Meaning: What does one value represent?"/>
-          <p:cNvSpPr/>
-          <p:nvPr/>
-        </p:nvSpPr>
-        <p:spPr>
-          <a:xfrm>
-            <a:off x="1097280" y="3389376"/>
-            <a:ext cx="9994392" cy="670560"/>
-          </a:xfrm>
-          <a:prstGeom prst="roundRect">
-            <a:avLst>
-              <a:gd name="adj" fmla="val 6000"/>
-            </a:avLst>
-          </a:prstGeom>
-          <a:solidFill>
-            <a:srgbClr val="E6E6E6"/>
-          </a:solidFill>
-          <a:ln w="19050">
-            <a:solidFill>
-              <a:srgbClr val="CCCCCC"/>
-            </a:solidFill>
-          </a:ln>
-        </p:spPr>
-        <p:txBody>
-          <a:bodyPr lIns="182880" tIns="182880" rIns="182880" bIns="182880" anchor="t" wrap="square">
-            <a:normAutofit/>
-          </a:bodyPr>
-          <a:lstStyle/>
-          <a:p>
-            <a:pPr algn="l"/>
-            <a:r>
-              <a:rPr lang="en-US" sz="2000" b="0" dirty="0">
-                <a:solidFill>
-                  <a:srgbClr val="010B13"/>
-                </a:solidFill>
-              </a:rPr>
-              <a:t>Dataset field: var_name Meaning: What does one value represent?</a:t>
+              <a:t>10 Classify the practice variables (continued 2)</a:t>
+            </a:r>
+          </a:p>
+        </p:txBody>
+      </p:sp>
+      <p:sp>
+        <p:nvSpPr>
+          <p:cNvPr id="3" name="Content Placeholder 2"/>
+          <p:cNvSpPr>
+            <a:spLocks noGrp="1"/>
+          </p:cNvSpPr>
+          <p:nvPr>
+            <p:ph idx="1"/>
+          </p:nvPr>
+        </p:nvSpPr>
+        <p:spPr/>
+        <p:txBody>
+          <a:bodyPr/>
+          <a:lstStyle/>
+          <a:p>
+            <a:pPr lvl="0" indent="0" marL="0">
+              <a:buNone/>
+            </a:pPr>
+            <a:r>
+              <a:rPr/>
+              <a:t>Choose qualitative or quantitative, then mean (SD) or mode (number of categories).</a:t>
             </a:r>
           </a:p>
         </p:txBody>
@@ -5641,7 +6041,7 @@
             </a:pPr>
             <a:r>
               <a:rPr/>
-              <a:t>14 Check before submitting</a:t>
+              <a:t>11 Classify the next three variables</a:t>
             </a:r>
           </a:p>
         </p:txBody>
@@ -5661,43 +6061,723 @@
           <a:bodyPr/>
           <a:lstStyle/>
           <a:p>
-            <a:pPr lvl="0" indent="-457200" marL="457200">
-              <a:buAutoNum type="arabicPeriod"/>
+            <a:pPr lvl="0" indent="0" marL="0">
+              <a:buNone/>
             </a:pPr>
             <a:r>
               <a:rPr/>
-              <a:t>Name the dataset and core variable.</a:t>
-            </a:r>
-          </a:p>
-          <a:p>
-            <a:pPr lvl="0" indent="-457200" marL="457200">
-              <a:buAutoNum type="arabicPeriod"/>
+              <a:t>Use the same choices for type and descriptive statistics</a:t>
+            </a:r>
+          </a:p>
+        </p:txBody>
+      </p:sp>
+    </p:spTree>
+  </p:cSld>
+</p:sld>
+</file>
+
+<file path=ppt/slides/slide16.xml><?xml version="1.0" encoding="utf-8"?>
+<p:sld xmlns:a="http://schemas.openxmlformats.org/drawingml/2006/main" xmlns:r="http://schemas.openxmlformats.org/officeDocument/2006/relationships" xmlns:p="http://schemas.openxmlformats.org/presentationml/2006/main">
+  <p:cSld>
+    <p:spTree>
+      <p:nvGrpSpPr>
+        <p:cNvPr id="1" name=""/>
+        <p:cNvGrpSpPr/>
+        <p:nvPr/>
+      </p:nvGrpSpPr>
+      <p:grpSpPr>
+        <a:xfrm>
+          <a:off x="0" y="0"/>
+          <a:ext cx="0" cy="0"/>
+          <a:chOff x="0" y="0"/>
+          <a:chExt cx="0" cy="0"/>
+        </a:xfrm>
+      </p:grpSpPr>
+      <p:sp>
+        <p:nvSpPr>
+          <p:cNvPr id="2" name="Title 1"/>
+          <p:cNvSpPr>
+            <a:spLocks noGrp="1"/>
+          </p:cNvSpPr>
+          <p:nvPr>
+            <p:ph type="title"/>
+          </p:nvPr>
+        </p:nvSpPr>
+        <p:spPr>
+          <a:xfrm>
+            <a:off x="1097280" y="964692"/>
+            <a:ext cx="9997440" cy="1188720"/>
+          </a:xfrm>
+        </p:spPr>
+        <p:txBody>
+          <a:bodyPr/>
+          <a:lstStyle/>
+          <a:p>
+            <a:pPr lvl="0" indent="0" marL="0">
+              <a:buNone/>
             </a:pPr>
             <a:r>
               <a:rPr/>
-              <a:t>Confirm each qualitative variable has exactly two groups.</a:t>
-            </a:r>
-          </a:p>
-          <a:p>
-            <a:pPr lvl="0" indent="-457200" marL="457200">
-              <a:buAutoNum type="arabicPeriod"/>
+              <a:t>11 Classify the next three variables (continued)</a:t>
+            </a:r>
+          </a:p>
+        </p:txBody>
+      </p:sp>
+      <p:graphicFrame>
+        <p:nvGraphicFramePr>
+          <p:cNvPr id="6" name="Content Placeholder 5"/>
+          <p:cNvGraphicFramePr>
+            <a:graphicFrameLocks noGrp="1"/>
+          </p:cNvGraphicFramePr>
+          <p:nvPr>
+            <p:ph idx="1"/>
+          </p:nvPr>
+        </p:nvGraphicFramePr>
+        <p:xfrm>
+          <a:off x="1092200" y="2628900"/>
+          <a:ext cx="9994900" cy="3098800"/>
+        </p:xfrm>
+        <a:graphic>
+          <a:graphicData uri="http://schemas.openxmlformats.org/drawingml/2006/table">
+            <a:tbl>
+              <a:tblPr firstRow="1" bandRow="1">
+                <a:tableStyleId>{5C22544A-7EE6-4342-B048-85BDC9FD1C3A}</a:tableStyleId>
+              </a:tblPr>
+              <a:tblGrid>
+                <a:gridCol w="3327400"/>
+                <a:gridCol w="3327400"/>
+                <a:gridCol w="3327400"/>
+              </a:tblGrid>
+              <a:tr h="0">
+                <a:tc>
+                  <a:txBody>
+                    <a:bodyPr/>
+                    <a:lstStyle/>
+                    <a:p>
+                      <a:pPr lvl="0" indent="0" marL="0">
+                        <a:buNone/>
+                      </a:pPr>
+                      <a:r>
+                        <a:rPr/>
+                        <a:t>Variable</a:t>
+                      </a:r>
+                    </a:p>
+                  </a:txBody>
+                  <a:tcPr/>
+                </a:tc>
+                <a:tc>
+                  <a:txBody>
+                    <a:bodyPr/>
+                    <a:lstStyle/>
+                    <a:p>
+                      <a:pPr lvl="0" indent="0" marL="0">
+                        <a:buNone/>
+                      </a:pPr>
+                      <a:r>
+                        <a:rPr/>
+                        <a:t>Type</a:t>
+                      </a:r>
+                    </a:p>
+                  </a:txBody>
+                  <a:tcPr/>
+                </a:tc>
+                <a:tc>
+                  <a:txBody>
+                    <a:bodyPr/>
+                    <a:lstStyle/>
+                    <a:p>
+                      <a:pPr lvl="0" indent="0" marL="0">
+                        <a:buNone/>
+                      </a:pPr>
+                      <a:r>
+                        <a:rPr/>
+                        <a:t>Descriptive statistics</a:t>
+                      </a:r>
+                    </a:p>
+                  </a:txBody>
+                  <a:tcPr/>
+                </a:tc>
+              </a:tr>
+              <a:tr h="0">
+                <a:tc>
+                  <a:txBody>
+                    <a:bodyPr/>
+                    <a:lstStyle/>
+                    <a:p>
+                      <a:pPr lvl="0" indent="0" marL="0">
+                        <a:buNone/>
+                      </a:pPr>
+                      <a:r>
+                        <a:rPr/>
+                        <a:t>lois_height_in</a:t>
+                      </a:r>
+                    </a:p>
+                  </a:txBody>
+                </a:tc>
+                <a:tc>
+                  <a:txBody>
+                    <a:bodyPr/>
+                    <a:lstStyle/>
+                    <a:p>
+                      <a:pPr lvl="0" indent="0" marL="0">
+                        <a:buNone/>
+                      </a:pPr>
+                      <a:r>
+                        <a:rPr/>
+                        <a:t>______</a:t>
+                      </a:r>
+                    </a:p>
+                  </a:txBody>
+                </a:tc>
+                <a:tc>
+                  <a:txBody>
+                    <a:bodyPr/>
+                    <a:lstStyle/>
+                    <a:p>
+                      <a:pPr lvl="0" indent="0" marL="0">
+                        <a:buNone/>
+                      </a:pPr>
+                      <a:r>
+                        <a:rPr/>
+                        <a:t>______</a:t>
+                      </a:r>
+                    </a:p>
+                  </a:txBody>
+                </a:tc>
+              </a:tr>
+              <a:tr h="0">
+                <a:tc>
+                  <a:txBody>
+                    <a:bodyPr/>
+                    <a:lstStyle/>
+                    <a:p>
+                      <a:pPr lvl="0" indent="0" marL="0">
+                        <a:buNone/>
+                      </a:pPr>
+                      <a:r>
+                        <a:rPr/>
+                        <a:t>rt_critics_score</a:t>
+                      </a:r>
+                    </a:p>
+                  </a:txBody>
+                </a:tc>
+                <a:tc>
+                  <a:txBody>
+                    <a:bodyPr/>
+                    <a:lstStyle/>
+                    <a:p>
+                      <a:pPr lvl="0" indent="0" marL="0">
+                        <a:buNone/>
+                      </a:pPr>
+                      <a:r>
+                        <a:rPr/>
+                        <a:t>______</a:t>
+                      </a:r>
+                    </a:p>
+                  </a:txBody>
+                </a:tc>
+                <a:tc>
+                  <a:txBody>
+                    <a:bodyPr/>
+                    <a:lstStyle/>
+                    <a:p>
+                      <a:pPr lvl="0" indent="0" marL="0">
+                        <a:buNone/>
+                      </a:pPr>
+                      <a:r>
+                        <a:rPr/>
+                        <a:t>______</a:t>
+                      </a:r>
+                    </a:p>
+                  </a:txBody>
+                </a:tc>
+              </a:tr>
+              <a:tr h="0">
+                <a:tc>
+                  <a:txBody>
+                    <a:bodyPr/>
+                    <a:lstStyle/>
+                    <a:p>
+                      <a:pPr lvl="0" indent="0" marL="0">
+                        <a:buNone/>
+                      </a:pPr>
+                      <a:r>
+                        <a:rPr/>
+                        <a:t>rt_audience_score</a:t>
+                      </a:r>
+                    </a:p>
+                  </a:txBody>
+                </a:tc>
+                <a:tc>
+                  <a:txBody>
+                    <a:bodyPr/>
+                    <a:lstStyle/>
+                    <a:p>
+                      <a:pPr lvl="0" indent="0" marL="0">
+                        <a:buNone/>
+                      </a:pPr>
+                      <a:r>
+                        <a:rPr/>
+                        <a:t>______</a:t>
+                      </a:r>
+                    </a:p>
+                  </a:txBody>
+                </a:tc>
+                <a:tc>
+                  <a:txBody>
+                    <a:bodyPr/>
+                    <a:lstStyle/>
+                    <a:p>
+                      <a:pPr lvl="0" indent="0" marL="0">
+                        <a:buNone/>
+                      </a:pPr>
+                      <a:r>
+                        <a:rPr/>
+                        <a:t>______</a:t>
+                      </a:r>
+                    </a:p>
+                  </a:txBody>
+                </a:tc>
+              </a:tr>
+            </a:tbl>
+          </a:graphicData>
+        </a:graphic>
+      </p:graphicFrame>
+    </p:spTree>
+  </p:cSld>
+</p:sld>
+</file>
+
+<file path=ppt/slides/slide17.xml><?xml version="1.0" encoding="utf-8"?>
+<p:sld xmlns:a="http://schemas.openxmlformats.org/drawingml/2006/main" xmlns:r="http://schemas.openxmlformats.org/officeDocument/2006/relationships" xmlns:p="http://schemas.openxmlformats.org/presentationml/2006/main">
+  <p:cSld>
+    <p:spTree>
+      <p:nvGrpSpPr>
+        <p:cNvPr id="1" name=""/>
+        <p:cNvGrpSpPr/>
+        <p:nvPr/>
+      </p:nvGrpSpPr>
+      <p:grpSpPr>
+        <a:xfrm>
+          <a:off x="0" y="0"/>
+          <a:ext cx="0" cy="0"/>
+          <a:chOff x="0" y="0"/>
+          <a:chExt cx="0" cy="0"/>
+        </a:xfrm>
+      </p:grpSpPr>
+      <p:sp>
+        <p:nvSpPr>
+          <p:cNvPr id="2" name="Title 1"/>
+          <p:cNvSpPr>
+            <a:spLocks noGrp="1"/>
+          </p:cNvSpPr>
+          <p:nvPr>
+            <p:ph type="title"/>
+          </p:nvPr>
+        </p:nvSpPr>
+        <p:spPr>
+          <a:xfrm>
+            <a:off x="1097280" y="964692"/>
+            <a:ext cx="9997440" cy="1188720"/>
+          </a:xfrm>
+        </p:spPr>
+        <p:txBody>
+          <a:bodyPr/>
+          <a:lstStyle/>
+          <a:p>
+            <a:pPr lvl="0" indent="0" marL="0">
+              <a:buNone/>
             </a:pPr>
             <a:r>
               <a:rPr/>
-              <a:t>Verify every transformation in saved syntax.</a:t>
-            </a:r>
-          </a:p>
-          <a:p>
-            <a:pPr lvl="0" indent="-457200" marL="457200">
-              <a:buAutoNum type="arabicPeriod"/>
+              <a:t>11 Classify the next three variables (continued 2)</a:t>
+            </a:r>
+          </a:p>
+        </p:txBody>
+      </p:sp>
+      <p:sp>
+        <p:nvSpPr>
+          <p:cNvPr id="3" name="Content Placeholder 2"/>
+          <p:cNvSpPr>
+            <a:spLocks noGrp="1"/>
+          </p:cNvSpPr>
+          <p:nvPr>
+            <p:ph idx="1"/>
+          </p:nvPr>
+        </p:nvSpPr>
+        <p:spPr/>
+        <p:txBody>
+          <a:bodyPr/>
+          <a:lstStyle/>
+          <a:p>
+            <a:pPr lvl="0" indent="0" marL="0">
+              <a:buNone/>
             </a:pPr>
             <a:r>
               <a:rPr/>
-              <a:t>Complete four directional RHs and support their rationales with three sources.</a:t>
-            </a:r>
-          </a:p>
-        </p:txBody>
-      </p:sp>
+              <a:t>Choose qualitative or quantitative, then mean (SD) or mode (number of categories).</a:t>
+            </a:r>
+          </a:p>
+        </p:txBody>
+      </p:sp>
+    </p:spTree>
+  </p:cSld>
+</p:sld>
+</file>
+
+<file path=ppt/slides/slide18.xml><?xml version="1.0" encoding="utf-8"?>
+<p:sld xmlns:a="http://schemas.openxmlformats.org/drawingml/2006/main" xmlns:r="http://schemas.openxmlformats.org/officeDocument/2006/relationships" xmlns:p="http://schemas.openxmlformats.org/presentationml/2006/main">
+  <p:cSld>
+    <p:spTree>
+      <p:nvGrpSpPr>
+        <p:cNvPr id="1" name=""/>
+        <p:cNvGrpSpPr/>
+        <p:nvPr/>
+      </p:nvGrpSpPr>
+      <p:grpSpPr>
+        <a:xfrm>
+          <a:off x="0" y="0"/>
+          <a:ext cx="0" cy="0"/>
+          <a:chOff x="0" y="0"/>
+          <a:chExt cx="0" cy="0"/>
+        </a:xfrm>
+      </p:grpSpPr>
+      <p:sp>
+        <p:nvSpPr>
+          <p:cNvPr id="2" name="Title 1"/>
+          <p:cNvSpPr>
+            <a:spLocks noGrp="1"/>
+          </p:cNvSpPr>
+          <p:nvPr>
+            <p:ph type="title"/>
+          </p:nvPr>
+        </p:nvSpPr>
+        <p:spPr>
+          <a:xfrm>
+            <a:off x="1097280" y="964692"/>
+            <a:ext cx="9997440" cy="1188720"/>
+          </a:xfrm>
+        </p:spPr>
+        <p:txBody>
+          <a:bodyPr/>
+          <a:lstStyle/>
+          <a:p>
+            <a:pPr lvl="0" indent="0" marL="0">
+              <a:buNone/>
+            </a:pPr>
+            <a:r>
+              <a:rPr/>
+              <a:t>12 Choose three correlation pairs</a:t>
+            </a:r>
+          </a:p>
+        </p:txBody>
+      </p:sp>
+      <p:sp>
+        <p:nvSpPr>
+          <p:cNvPr id="3" name="Content Placeholder 2"/>
+          <p:cNvSpPr>
+            <a:spLocks noGrp="1"/>
+          </p:cNvSpPr>
+          <p:nvPr>
+            <p:ph idx="1"/>
+          </p:nvPr>
+        </p:nvSpPr>
+        <p:spPr/>
+        <p:txBody>
+          <a:bodyPr/>
+          <a:lstStyle/>
+          <a:p>
+            <a:pPr lvl="0" indent="0" marL="0">
+              <a:buNone/>
+            </a:pPr>
+            <a:r>
+              <a:rPr/>
+              <a:t>Select three distinct pairs for Pearson’s r</a:t>
+            </a:r>
+          </a:p>
+          <a:p>
+            <a:pPr lvl="0" indent="0" marL="0">
+              <a:buNone/>
+            </a:pPr>
+            <a:r>
+              <a:rPr/>
+              <a:t>Choose 3 distinct pair(s) from: clark_grp, tomatometer, clark_height_in, lois_height_in, rt_critics_score, rt_audience_score.</a:t>
+            </a:r>
+          </a:p>
+        </p:txBody>
+      </p:sp>
+    </p:spTree>
+  </p:cSld>
+</p:sld>
+</file>
+
+<file path=ppt/slides/slide19.xml><?xml version="1.0" encoding="utf-8"?>
+<p:sld xmlns:a="http://schemas.openxmlformats.org/drawingml/2006/main" xmlns:r="http://schemas.openxmlformats.org/officeDocument/2006/relationships" xmlns:p="http://schemas.openxmlformats.org/presentationml/2006/main">
+  <p:cSld>
+    <p:spTree>
+      <p:nvGrpSpPr>
+        <p:cNvPr id="1" name=""/>
+        <p:cNvGrpSpPr/>
+        <p:nvPr/>
+      </p:nvGrpSpPr>
+      <p:grpSpPr>
+        <a:xfrm>
+          <a:off x="0" y="0"/>
+          <a:ext cx="0" cy="0"/>
+          <a:chOff x="0" y="0"/>
+          <a:chExt cx="0" cy="0"/>
+        </a:xfrm>
+      </p:grpSpPr>
+      <p:sp>
+        <p:nvSpPr>
+          <p:cNvPr id="2" name="Title 1"/>
+          <p:cNvSpPr>
+            <a:spLocks noGrp="1"/>
+          </p:cNvSpPr>
+          <p:nvPr>
+            <p:ph type="title"/>
+          </p:nvPr>
+        </p:nvSpPr>
+        <p:spPr>
+          <a:xfrm>
+            <a:off x="1097280" y="964692"/>
+            <a:ext cx="9997440" cy="1188720"/>
+          </a:xfrm>
+        </p:spPr>
+        <p:txBody>
+          <a:bodyPr/>
+          <a:lstStyle/>
+          <a:p>
+            <a:pPr lvl="0" indent="0" marL="0">
+              <a:buNone/>
+            </a:pPr>
+            <a:r>
+              <a:rPr/>
+              <a:t>12 Choose three correlation pairs (continued)</a:t>
+            </a:r>
+          </a:p>
+        </p:txBody>
+      </p:sp>
+      <p:graphicFrame>
+        <p:nvGraphicFramePr>
+          <p:cNvPr id="6" name="Content Placeholder 5"/>
+          <p:cNvGraphicFramePr>
+            <a:graphicFrameLocks noGrp="1"/>
+          </p:cNvGraphicFramePr>
+          <p:nvPr>
+            <p:ph idx="1"/>
+          </p:nvPr>
+        </p:nvGraphicFramePr>
+        <p:xfrm>
+          <a:off x="1092200" y="2628900"/>
+          <a:ext cx="9994900" cy="3098800"/>
+        </p:xfrm>
+        <a:graphic>
+          <a:graphicData uri="http://schemas.openxmlformats.org/drawingml/2006/table">
+            <a:tbl>
+              <a:tblPr firstRow="1" bandRow="1">
+                <a:tableStyleId>{5C22544A-7EE6-4342-B048-85BDC9FD1C3A}</a:tableStyleId>
+              </a:tblPr>
+              <a:tblGrid>
+                <a:gridCol w="3327400"/>
+                <a:gridCol w="3327400"/>
+                <a:gridCol w="3327400"/>
+              </a:tblGrid>
+              <a:tr h="0">
+                <a:tc>
+                  <a:txBody>
+                    <a:bodyPr/>
+                    <a:lstStyle/>
+                    <a:p>
+                      <a:pPr lvl="0" indent="0" marL="0">
+                        <a:buNone/>
+                      </a:pPr>
+                      <a:r>
+                        <a:rPr/>
+                        <a:t>Pair</a:t>
+                      </a:r>
+                    </a:p>
+                  </a:txBody>
+                  <a:tcPr/>
+                </a:tc>
+                <a:tc>
+                  <a:txBody>
+                    <a:bodyPr/>
+                    <a:lstStyle/>
+                    <a:p>
+                      <a:pPr lvl="0" indent="0" marL="0">
+                        <a:buNone/>
+                      </a:pPr>
+                      <a:r>
+                        <a:rPr/>
+                        <a:t>Variable 1</a:t>
+                      </a:r>
+                    </a:p>
+                  </a:txBody>
+                  <a:tcPr/>
+                </a:tc>
+                <a:tc>
+                  <a:txBody>
+                    <a:bodyPr/>
+                    <a:lstStyle/>
+                    <a:p>
+                      <a:pPr lvl="0" indent="0" marL="0">
+                        <a:buNone/>
+                      </a:pPr>
+                      <a:r>
+                        <a:rPr/>
+                        <a:t>Variable 2</a:t>
+                      </a:r>
+                    </a:p>
+                  </a:txBody>
+                  <a:tcPr/>
+                </a:tc>
+              </a:tr>
+              <a:tr h="0">
+                <a:tc>
+                  <a:txBody>
+                    <a:bodyPr/>
+                    <a:lstStyle/>
+                    <a:p>
+                      <a:pPr lvl="0" indent="0" marL="0">
+                        <a:buNone/>
+                      </a:pPr>
+                      <a:r>
+                        <a:rPr/>
+                        <a:t>1</a:t>
+                      </a:r>
+                    </a:p>
+                  </a:txBody>
+                </a:tc>
+                <a:tc>
+                  <a:txBody>
+                    <a:bodyPr/>
+                    <a:lstStyle/>
+                    <a:p>
+                      <a:pPr lvl="0" indent="0" marL="0">
+                        <a:buNone/>
+                      </a:pPr>
+                      <a:r>
+                        <a:rPr/>
+                        <a:t>______</a:t>
+                      </a:r>
+                    </a:p>
+                  </a:txBody>
+                </a:tc>
+                <a:tc>
+                  <a:txBody>
+                    <a:bodyPr/>
+                    <a:lstStyle/>
+                    <a:p>
+                      <a:pPr lvl="0" indent="0" marL="0">
+                        <a:buNone/>
+                      </a:pPr>
+                      <a:r>
+                        <a:rPr/>
+                        <a:t>______</a:t>
+                      </a:r>
+                    </a:p>
+                  </a:txBody>
+                </a:tc>
+              </a:tr>
+              <a:tr h="0">
+                <a:tc>
+                  <a:txBody>
+                    <a:bodyPr/>
+                    <a:lstStyle/>
+                    <a:p>
+                      <a:pPr lvl="0" indent="0" marL="0">
+                        <a:buNone/>
+                      </a:pPr>
+                      <a:r>
+                        <a:rPr/>
+                        <a:t>2</a:t>
+                      </a:r>
+                    </a:p>
+                  </a:txBody>
+                </a:tc>
+                <a:tc>
+                  <a:txBody>
+                    <a:bodyPr/>
+                    <a:lstStyle/>
+                    <a:p>
+                      <a:pPr lvl="0" indent="0" marL="0">
+                        <a:buNone/>
+                      </a:pPr>
+                      <a:r>
+                        <a:rPr/>
+                        <a:t>______</a:t>
+                      </a:r>
+                    </a:p>
+                  </a:txBody>
+                </a:tc>
+                <a:tc>
+                  <a:txBody>
+                    <a:bodyPr/>
+                    <a:lstStyle/>
+                    <a:p>
+                      <a:pPr lvl="0" indent="0" marL="0">
+                        <a:buNone/>
+                      </a:pPr>
+                      <a:r>
+                        <a:rPr/>
+                        <a:t>______</a:t>
+                      </a:r>
+                    </a:p>
+                  </a:txBody>
+                </a:tc>
+              </a:tr>
+              <a:tr h="0">
+                <a:tc>
+                  <a:txBody>
+                    <a:bodyPr/>
+                    <a:lstStyle/>
+                    <a:p>
+                      <a:pPr lvl="0" indent="0" marL="0">
+                        <a:buNone/>
+                      </a:pPr>
+                      <a:r>
+                        <a:rPr/>
+                        <a:t>3</a:t>
+                      </a:r>
+                    </a:p>
+                  </a:txBody>
+                </a:tc>
+                <a:tc>
+                  <a:txBody>
+                    <a:bodyPr/>
+                    <a:lstStyle/>
+                    <a:p>
+                      <a:pPr lvl="0" indent="0" marL="0">
+                        <a:buNone/>
+                      </a:pPr>
+                      <a:r>
+                        <a:rPr/>
+                        <a:t>______</a:t>
+                      </a:r>
+                    </a:p>
+                  </a:txBody>
+                </a:tc>
+                <a:tc>
+                  <a:txBody>
+                    <a:bodyPr/>
+                    <a:lstStyle/>
+                    <a:p>
+                      <a:pPr lvl="0" indent="0" marL="0">
+                        <a:buNone/>
+                      </a:pPr>
+                      <a:r>
+                        <a:rPr/>
+                        <a:t>______</a:t>
+                      </a:r>
+                    </a:p>
+                  </a:txBody>
+                </a:tc>
+              </a:tr>
+            </a:tbl>
+          </a:graphicData>
+        </a:graphic>
+      </p:graphicFrame>
     </p:spTree>
   </p:cSld>
 </p:sld>
@@ -5745,7 +6825,303 @@
             </a:pPr>
             <a:r>
               <a:rPr/>
-              <a:t>1 Prepare the project materials</a:t>
+              <a:t>1 Open the project files</a:t>
+            </a:r>
+          </a:p>
+        </p:txBody>
+      </p:sp>
+      <p:sp>
+        <p:nvSpPr>
+          <p:cNvPr id="1001" name="card-steel" descr="card: Data downloads. Superman practice Self-Descriptive Interpersonal"/>
+          <p:cNvSpPr/>
+          <p:nvPr/>
+        </p:nvSpPr>
+        <p:spPr>
+          <a:xfrm>
+            <a:off x="1097280" y="2633472"/>
+            <a:ext cx="4924044" cy="1615440"/>
+          </a:xfrm>
+          <a:prstGeom prst="roundRect">
+            <a:avLst>
+              <a:gd name="adj" fmla="val 6000"/>
+            </a:avLst>
+          </a:prstGeom>
+          <a:solidFill>
+            <a:srgbClr val="FEFDFA"/>
+          </a:solidFill>
+          <a:ln w="19050">
+            <a:solidFill>
+              <a:srgbClr val="CCCCCC"/>
+            </a:solidFill>
+          </a:ln>
+        </p:spPr>
+        <p:txBody>
+          <a:bodyPr lIns="182880" tIns="182880" rIns="182880" bIns="182880" anchor="t" wrap="square">
+            <a:normAutofit/>
+          </a:bodyPr>
+          <a:lstStyle/>
+          <a:p>
+            <a:pPr algn="l"/>
+            <a:r>
+              <a:rPr lang="en-US" sz="2200" b="1" dirty="0">
+                <a:solidFill>
+                  <a:srgbClr val="010B13"/>
+                </a:solidFill>
+              </a:rPr>
+              <a:t>Data downloads</a:t>
+            </a:r>
+          </a:p>
+          <a:p>
+            <a:pPr algn="l"/>
+            <a:r>
+              <a:rPr lang="en-US" sz="2000" b="0" dirty="0">
+                <a:solidFill>
+                  <a:srgbClr val="010B13"/>
+                </a:solidFill>
+                <a:hlinkClick r:id="rId3"/>
+              </a:rPr>
+              <a:t>Superman practice</a:t>
+            </a:r>
+          </a:p>
+          <a:p>
+            <a:pPr algn="l"/>
+            <a:r>
+              <a:rPr lang="en-US" sz="2000" b="0" dirty="0">
+                <a:solidFill>
+                  <a:srgbClr val="010B13"/>
+                </a:solidFill>
+                <a:hlinkClick r:id="rId4"/>
+              </a:rPr>
+              <a:t>Self-Descriptive</a:t>
+            </a:r>
+          </a:p>
+          <a:p>
+            <a:pPr algn="l"/>
+            <a:r>
+              <a:rPr lang="en-US" sz="2000" b="0" dirty="0">
+                <a:solidFill>
+                  <a:srgbClr val="010B13"/>
+                </a:solidFill>
+                <a:hlinkClick r:id="rId5"/>
+              </a:rPr>
+              <a:t>Interpersonal</a:t>
+            </a:r>
+          </a:p>
+        </p:txBody>
+      </p:sp>
+      <p:sp>
+        <p:nvSpPr>
+          <p:cNvPr id="1002" name="card-rail" descr="">
+            <a:extLst>
+              <a:ext uri="{C183D7F6-B498-43B3-948B-1728B52AA6E4}">
+                <adec:decorative xmlns:adec="http://schemas.microsoft.com/office/drawing/2017/decorative" val="1"/>
+              </a:ext>
+            </a:extLst>
+          </p:cNvPr>
+          <p:cNvSpPr/>
+          <p:nvPr/>
+        </p:nvSpPr>
+        <p:spPr>
+          <a:xfrm>
+            <a:off x="1097280" y="2633472"/>
+            <a:ext cx="54864" cy="1615440"/>
+          </a:xfrm>
+          <a:prstGeom prst="roundRect">
+            <a:avLst>
+              <a:gd name="adj" fmla="val 20000"/>
+            </a:avLst>
+          </a:prstGeom>
+          <a:solidFill>
+            <a:srgbClr val="010B13"/>
+          </a:solidFill>
+          <a:ln>
+            <a:noFill/>
+          </a:ln>
+        </p:spPr>
+        <p:txBody>
+          <a:bodyPr lIns="182880" tIns="182880" rIns="182880" bIns="182880" anchor="t" wrap="square">
+            <a:normAutofit/>
+          </a:bodyPr>
+          <a:lstStyle/>
+          <a:p/>
+        </p:txBody>
+      </p:sp>
+      <p:sp>
+        <p:nvSpPr>
+          <p:cNvPr id="1003" name="card-steel" descr="card: Simple SPSS guides. Correlation PDF Chi-square PDF Between-groups PDF Within-groups PDF"/>
+          <p:cNvSpPr/>
+          <p:nvPr/>
+        </p:nvSpPr>
+        <p:spPr>
+          <a:xfrm>
+            <a:off x="6167628" y="2633472"/>
+            <a:ext cx="4924044" cy="1920240"/>
+          </a:xfrm>
+          <a:prstGeom prst="roundRect">
+            <a:avLst>
+              <a:gd name="adj" fmla="val 6000"/>
+            </a:avLst>
+          </a:prstGeom>
+          <a:solidFill>
+            <a:srgbClr val="FEFDFA"/>
+          </a:solidFill>
+          <a:ln w="19050">
+            <a:solidFill>
+              <a:srgbClr val="CCCCCC"/>
+            </a:solidFill>
+          </a:ln>
+        </p:spPr>
+        <p:txBody>
+          <a:bodyPr lIns="182880" tIns="182880" rIns="182880" bIns="182880" anchor="t" wrap="square">
+            <a:normAutofit/>
+          </a:bodyPr>
+          <a:lstStyle/>
+          <a:p>
+            <a:pPr algn="l"/>
+            <a:r>
+              <a:rPr lang="en-US" sz="2200" b="1" dirty="0">
+                <a:solidFill>
+                  <a:srgbClr val="010B13"/>
+                </a:solidFill>
+              </a:rPr>
+              <a:t>Simple SPSS guides</a:t>
+            </a:r>
+          </a:p>
+          <a:p>
+            <a:pPr algn="l"/>
+            <a:r>
+              <a:rPr lang="en-US" sz="2000" b="0" dirty="0">
+                <a:solidFill>
+                  <a:srgbClr val="010B13"/>
+                </a:solidFill>
+                <a:hlinkClick r:id="rId6"/>
+              </a:rPr>
+              <a:t>Correlation PDF</a:t>
+            </a:r>
+          </a:p>
+          <a:p>
+            <a:pPr algn="l"/>
+            <a:r>
+              <a:rPr lang="en-US" sz="2000" b="0" dirty="0">
+                <a:solidFill>
+                  <a:srgbClr val="010B13"/>
+                </a:solidFill>
+                <a:hlinkClick r:id="rId7"/>
+              </a:rPr>
+              <a:t>Chi-square PDF</a:t>
+            </a:r>
+          </a:p>
+          <a:p>
+            <a:pPr algn="l"/>
+            <a:r>
+              <a:rPr lang="en-US" sz="2000" b="0" dirty="0">
+                <a:solidFill>
+                  <a:srgbClr val="010B13"/>
+                </a:solidFill>
+                <a:hlinkClick r:id="rId8"/>
+              </a:rPr>
+              <a:t>Between-groups PDF</a:t>
+            </a:r>
+          </a:p>
+          <a:p>
+            <a:pPr algn="l"/>
+            <a:r>
+              <a:rPr lang="en-US" sz="2000" b="0" dirty="0">
+                <a:solidFill>
+                  <a:srgbClr val="010B13"/>
+                </a:solidFill>
+                <a:hlinkClick r:id="rId9"/>
+              </a:rPr>
+              <a:t>Within-groups PDF</a:t>
+            </a:r>
+          </a:p>
+        </p:txBody>
+      </p:sp>
+      <p:sp>
+        <p:nvSpPr>
+          <p:cNvPr id="1004" name="card-rail" descr="">
+            <a:extLst>
+              <a:ext uri="{C183D7F6-B498-43B3-948B-1728B52AA6E4}">
+                <adec:decorative xmlns:adec="http://schemas.microsoft.com/office/drawing/2017/decorative" val="1"/>
+              </a:ext>
+            </a:extLst>
+          </p:cNvPr>
+          <p:cNvSpPr/>
+          <p:nvPr/>
+        </p:nvSpPr>
+        <p:spPr>
+          <a:xfrm>
+            <a:off x="6167628" y="2633472"/>
+            <a:ext cx="54864" cy="1920240"/>
+          </a:xfrm>
+          <a:prstGeom prst="roundRect">
+            <a:avLst>
+              <a:gd name="adj" fmla="val 20000"/>
+            </a:avLst>
+          </a:prstGeom>
+          <a:solidFill>
+            <a:srgbClr val="010B13"/>
+          </a:solidFill>
+          <a:ln>
+            <a:noFill/>
+          </a:ln>
+        </p:spPr>
+        <p:txBody>
+          <a:bodyPr lIns="182880" tIns="182880" rIns="182880" bIns="182880" anchor="t" wrap="square">
+            <a:normAutofit/>
+          </a:bodyPr>
+          <a:lstStyle/>
+          <a:p/>
+        </p:txBody>
+      </p:sp>
+    </p:spTree>
+  </p:cSld>
+</p:sld>
+</file>
+
+<file path=ppt/slides/slide20.xml><?xml version="1.0" encoding="utf-8"?>
+<p:sld xmlns:a="http://schemas.openxmlformats.org/drawingml/2006/main" xmlns:r="http://schemas.openxmlformats.org/officeDocument/2006/relationships" xmlns:p="http://schemas.openxmlformats.org/presentationml/2006/main">
+  <p:cSld>
+    <p:spTree>
+      <p:nvGrpSpPr>
+        <p:cNvPr id="1" name=""/>
+        <p:cNvGrpSpPr/>
+        <p:nvPr/>
+      </p:nvGrpSpPr>
+      <p:grpSpPr>
+        <a:xfrm>
+          <a:off x="0" y="0"/>
+          <a:ext cx="0" cy="0"/>
+          <a:chOff x="0" y="0"/>
+          <a:chExt cx="0" cy="0"/>
+        </a:xfrm>
+      </p:grpSpPr>
+      <p:sp>
+        <p:nvSpPr>
+          <p:cNvPr id="2" name="Title 1"/>
+          <p:cNvSpPr>
+            <a:spLocks noGrp="1"/>
+          </p:cNvSpPr>
+          <p:nvPr>
+            <p:ph type="title"/>
+          </p:nvPr>
+        </p:nvSpPr>
+        <p:spPr>
+          <a:xfrm>
+            <a:off x="1097280" y="964692"/>
+            <a:ext cx="9997440" cy="1188720"/>
+          </a:xfrm>
+        </p:spPr>
+        <p:txBody>
+          <a:bodyPr/>
+          <a:lstStyle/>
+          <a:p>
+            <a:pPr lvl="0" indent="0" marL="0">
+              <a:buNone/>
+            </a:pPr>
+            <a:r>
+              <a:rPr/>
+              <a:t>13 Choose a chi-square pair</a:t>
             </a:r>
           </a:p>
         </p:txBody>
@@ -5757,102 +7133,1498 @@
             <a:spLocks noGrp="1"/>
           </p:cNvSpPr>
           <p:nvPr>
-            <p:ph idx="1" sz="half"/>
-          </p:nvPr>
-        </p:nvSpPr>
-        <p:spPr/>
-        <p:txBody>
-          <a:bodyPr/>
-          <a:lstStyle/>
+            <p:ph idx="1"/>
+          </p:nvPr>
+        </p:nvSpPr>
+        <p:spPr/>
+        <p:txBody>
+          <a:bodyPr/>
+          <a:lstStyle/>
+          <a:p>
+            <a:pPr lvl="0" indent="0" marL="0">
+              <a:buNone/>
+            </a:pPr>
+            <a:r>
+              <a:rPr/>
+              <a:t>Select one pair for a 2 × 2 chi-square test</a:t>
+            </a:r>
+          </a:p>
+          <a:p>
+            <a:pPr lvl="0" indent="0" marL="0">
+              <a:buNone/>
+            </a:pPr>
+            <a:r>
+              <a:rPr/>
+              <a:t>Choose 1 distinct pair(s) from: clark_grp, tomatometer, clark_height_in, lois_height_in, rt_critics_score, rt_audience_score.</a:t>
+            </a:r>
+          </a:p>
+        </p:txBody>
+      </p:sp>
+    </p:spTree>
+  </p:cSld>
+</p:sld>
+</file>
+
+<file path=ppt/slides/slide21.xml><?xml version="1.0" encoding="utf-8"?>
+<p:sld xmlns:a="http://schemas.openxmlformats.org/drawingml/2006/main" xmlns:r="http://schemas.openxmlformats.org/officeDocument/2006/relationships" xmlns:p="http://schemas.openxmlformats.org/presentationml/2006/main">
+  <p:cSld>
+    <p:spTree>
+      <p:nvGrpSpPr>
+        <p:cNvPr id="1" name=""/>
+        <p:cNvGrpSpPr/>
+        <p:nvPr/>
+      </p:nvGrpSpPr>
+      <p:grpSpPr>
+        <a:xfrm>
+          <a:off x="0" y="0"/>
+          <a:ext cx="0" cy="0"/>
+          <a:chOff x="0" y="0"/>
+          <a:chExt cx="0" cy="0"/>
+        </a:xfrm>
+      </p:grpSpPr>
+      <p:sp>
+        <p:nvSpPr>
+          <p:cNvPr id="2" name="Title 1"/>
+          <p:cNvSpPr>
+            <a:spLocks noGrp="1"/>
+          </p:cNvSpPr>
+          <p:nvPr>
+            <p:ph type="title"/>
+          </p:nvPr>
+        </p:nvSpPr>
+        <p:spPr>
+          <a:xfrm>
+            <a:off x="1097280" y="964692"/>
+            <a:ext cx="9997440" cy="1188720"/>
+          </a:xfrm>
+        </p:spPr>
+        <p:txBody>
+          <a:bodyPr/>
+          <a:lstStyle/>
+          <a:p>
+            <a:pPr lvl="0" indent="0" marL="0">
+              <a:buNone/>
+            </a:pPr>
+            <a:r>
+              <a:rPr/>
+              <a:t>13 Choose a chi-square pair (continued)</a:t>
+            </a:r>
+          </a:p>
+        </p:txBody>
+      </p:sp>
+      <p:graphicFrame>
+        <p:nvGraphicFramePr>
+          <p:cNvPr id="6" name="Content Placeholder 5"/>
+          <p:cNvGraphicFramePr>
+            <a:graphicFrameLocks noGrp="1"/>
+          </p:cNvGraphicFramePr>
+          <p:nvPr>
+            <p:ph idx="1"/>
+          </p:nvPr>
+        </p:nvGraphicFramePr>
+        <p:xfrm>
+          <a:off x="1092200" y="2628900"/>
+          <a:ext cx="9994900" cy="3098800"/>
+        </p:xfrm>
+        <a:graphic>
+          <a:graphicData uri="http://schemas.openxmlformats.org/drawingml/2006/table">
+            <a:tbl>
+              <a:tblPr firstRow="1" bandRow="1">
+                <a:tableStyleId>{5C22544A-7EE6-4342-B048-85BDC9FD1C3A}</a:tableStyleId>
+              </a:tblPr>
+              <a:tblGrid>
+                <a:gridCol w="3327400"/>
+                <a:gridCol w="3327400"/>
+                <a:gridCol w="3327400"/>
+              </a:tblGrid>
+              <a:tr h="0">
+                <a:tc>
+                  <a:txBody>
+                    <a:bodyPr/>
+                    <a:lstStyle/>
+                    <a:p>
+                      <a:pPr lvl="0" indent="0" marL="0">
+                        <a:buNone/>
+                      </a:pPr>
+                      <a:r>
+                        <a:rPr/>
+                        <a:t>Pair</a:t>
+                      </a:r>
+                    </a:p>
+                  </a:txBody>
+                  <a:tcPr/>
+                </a:tc>
+                <a:tc>
+                  <a:txBody>
+                    <a:bodyPr/>
+                    <a:lstStyle/>
+                    <a:p>
+                      <a:pPr lvl="0" indent="0" marL="0">
+                        <a:buNone/>
+                      </a:pPr>
+                      <a:r>
+                        <a:rPr/>
+                        <a:t>Variable 1</a:t>
+                      </a:r>
+                    </a:p>
+                  </a:txBody>
+                  <a:tcPr/>
+                </a:tc>
+                <a:tc>
+                  <a:txBody>
+                    <a:bodyPr/>
+                    <a:lstStyle/>
+                    <a:p>
+                      <a:pPr lvl="0" indent="0" marL="0">
+                        <a:buNone/>
+                      </a:pPr>
+                      <a:r>
+                        <a:rPr/>
+                        <a:t>Variable 2</a:t>
+                      </a:r>
+                    </a:p>
+                  </a:txBody>
+                  <a:tcPr/>
+                </a:tc>
+              </a:tr>
+              <a:tr h="0">
+                <a:tc>
+                  <a:txBody>
+                    <a:bodyPr/>
+                    <a:lstStyle/>
+                    <a:p>
+                      <a:pPr lvl="0" indent="0" marL="0">
+                        <a:buNone/>
+                      </a:pPr>
+                      <a:r>
+                        <a:rPr/>
+                        <a:t>1</a:t>
+                      </a:r>
+                    </a:p>
+                  </a:txBody>
+                </a:tc>
+                <a:tc>
+                  <a:txBody>
+                    <a:bodyPr/>
+                    <a:lstStyle/>
+                    <a:p>
+                      <a:pPr lvl="0" indent="0" marL="0">
+                        <a:buNone/>
+                      </a:pPr>
+                      <a:r>
+                        <a:rPr/>
+                        <a:t>______</a:t>
+                      </a:r>
+                    </a:p>
+                  </a:txBody>
+                </a:tc>
+                <a:tc>
+                  <a:txBody>
+                    <a:bodyPr/>
+                    <a:lstStyle/>
+                    <a:p>
+                      <a:pPr lvl="0" indent="0" marL="0">
+                        <a:buNone/>
+                      </a:pPr>
+                      <a:r>
+                        <a:rPr/>
+                        <a:t>______</a:t>
+                      </a:r>
+                    </a:p>
+                  </a:txBody>
+                </a:tc>
+              </a:tr>
+            </a:tbl>
+          </a:graphicData>
+        </a:graphic>
+      </p:graphicFrame>
+    </p:spTree>
+  </p:cSld>
+</p:sld>
+</file>
+
+<file path=ppt/slides/slide22.xml><?xml version="1.0" encoding="utf-8"?>
+<p:sld xmlns:a="http://schemas.openxmlformats.org/drawingml/2006/main" xmlns:r="http://schemas.openxmlformats.org/officeDocument/2006/relationships" xmlns:p="http://schemas.openxmlformats.org/presentationml/2006/main">
+  <p:cSld>
+    <p:spTree>
+      <p:nvGrpSpPr>
+        <p:cNvPr id="1" name=""/>
+        <p:cNvGrpSpPr/>
+        <p:nvPr/>
+      </p:nvGrpSpPr>
+      <p:grpSpPr>
+        <a:xfrm>
+          <a:off x="0" y="0"/>
+          <a:ext cx="0" cy="0"/>
+          <a:chOff x="0" y="0"/>
+          <a:chExt cx="0" cy="0"/>
+        </a:xfrm>
+      </p:grpSpPr>
+      <p:sp>
+        <p:nvSpPr>
+          <p:cNvPr id="2" name="Title 1"/>
+          <p:cNvSpPr>
+            <a:spLocks noGrp="1"/>
+          </p:cNvSpPr>
+          <p:nvPr>
+            <p:ph type="title"/>
+          </p:nvPr>
+        </p:nvSpPr>
+        <p:spPr>
+          <a:xfrm>
+            <a:off x="1097280" y="964692"/>
+            <a:ext cx="9997440" cy="1188720"/>
+          </a:xfrm>
+        </p:spPr>
+        <p:txBody>
+          <a:bodyPr/>
+          <a:lstStyle/>
+          <a:p>
+            <a:pPr lvl="0" indent="0" marL="0">
+              <a:buNone/>
+            </a:pPr>
+            <a:r>
+              <a:rPr/>
+              <a:t>14 Choose three between-groups pairs</a:t>
+            </a:r>
+          </a:p>
+        </p:txBody>
+      </p:sp>
+      <p:sp>
+        <p:nvSpPr>
+          <p:cNvPr id="3" name="Content Placeholder 2"/>
+          <p:cNvSpPr>
+            <a:spLocks noGrp="1"/>
+          </p:cNvSpPr>
+          <p:nvPr>
+            <p:ph idx="1"/>
+          </p:nvPr>
+        </p:nvSpPr>
+        <p:spPr/>
+        <p:txBody>
+          <a:bodyPr/>
+          <a:lstStyle/>
+          <a:p>
+            <a:pPr lvl="0" indent="0" marL="0">
+              <a:buNone/>
+            </a:pPr>
+            <a:r>
+              <a:rPr/>
+              <a:t>Select the group variable first, then the score variable</a:t>
+            </a:r>
+          </a:p>
+          <a:p>
+            <a:pPr lvl="0" indent="0" marL="0">
+              <a:buNone/>
+            </a:pPr>
+            <a:r>
+              <a:rPr/>
+              <a:t>Choose 3 distinct pair(s) from: clark_grp, tomatometer, clark_height_in, lois_height_in, rt_critics_score, rt_audience_score.</a:t>
+            </a:r>
+          </a:p>
+        </p:txBody>
+      </p:sp>
+    </p:spTree>
+  </p:cSld>
+</p:sld>
+</file>
+
+<file path=ppt/slides/slide23.xml><?xml version="1.0" encoding="utf-8"?>
+<p:sld xmlns:a="http://schemas.openxmlformats.org/drawingml/2006/main" xmlns:r="http://schemas.openxmlformats.org/officeDocument/2006/relationships" xmlns:p="http://schemas.openxmlformats.org/presentationml/2006/main">
+  <p:cSld>
+    <p:spTree>
+      <p:nvGrpSpPr>
+        <p:cNvPr id="1" name=""/>
+        <p:cNvGrpSpPr/>
+        <p:nvPr/>
+      </p:nvGrpSpPr>
+      <p:grpSpPr>
+        <a:xfrm>
+          <a:off x="0" y="0"/>
+          <a:ext cx="0" cy="0"/>
+          <a:chOff x="0" y="0"/>
+          <a:chExt cx="0" cy="0"/>
+        </a:xfrm>
+      </p:grpSpPr>
+      <p:sp>
+        <p:nvSpPr>
+          <p:cNvPr id="2" name="Title 1"/>
+          <p:cNvSpPr>
+            <a:spLocks noGrp="1"/>
+          </p:cNvSpPr>
+          <p:nvPr>
+            <p:ph type="title"/>
+          </p:nvPr>
+        </p:nvSpPr>
+        <p:spPr>
+          <a:xfrm>
+            <a:off x="1097280" y="964692"/>
+            <a:ext cx="9997440" cy="1188720"/>
+          </a:xfrm>
+        </p:spPr>
+        <p:txBody>
+          <a:bodyPr/>
+          <a:lstStyle/>
+          <a:p>
+            <a:pPr lvl="0" indent="0" marL="0">
+              <a:buNone/>
+            </a:pPr>
+            <a:r>
+              <a:rPr/>
+              <a:t>14 Choose three between-groups pairs (continued)</a:t>
+            </a:r>
+          </a:p>
+        </p:txBody>
+      </p:sp>
+      <p:graphicFrame>
+        <p:nvGraphicFramePr>
+          <p:cNvPr id="6" name="Content Placeholder 5"/>
+          <p:cNvGraphicFramePr>
+            <a:graphicFrameLocks noGrp="1"/>
+          </p:cNvGraphicFramePr>
+          <p:nvPr>
+            <p:ph idx="1"/>
+          </p:nvPr>
+        </p:nvGraphicFramePr>
+        <p:xfrm>
+          <a:off x="1092200" y="2628900"/>
+          <a:ext cx="9994900" cy="3098800"/>
+        </p:xfrm>
+        <a:graphic>
+          <a:graphicData uri="http://schemas.openxmlformats.org/drawingml/2006/table">
+            <a:tbl>
+              <a:tblPr firstRow="1" bandRow="1">
+                <a:tableStyleId>{5C22544A-7EE6-4342-B048-85BDC9FD1C3A}</a:tableStyleId>
+              </a:tblPr>
+              <a:tblGrid>
+                <a:gridCol w="3327400"/>
+                <a:gridCol w="3327400"/>
+                <a:gridCol w="3327400"/>
+              </a:tblGrid>
+              <a:tr h="0">
+                <a:tc>
+                  <a:txBody>
+                    <a:bodyPr/>
+                    <a:lstStyle/>
+                    <a:p>
+                      <a:pPr lvl="0" indent="0" marL="0">
+                        <a:buNone/>
+                      </a:pPr>
+                      <a:r>
+                        <a:rPr/>
+                        <a:t>Pair</a:t>
+                      </a:r>
+                    </a:p>
+                  </a:txBody>
+                  <a:tcPr/>
+                </a:tc>
+                <a:tc>
+                  <a:txBody>
+                    <a:bodyPr/>
+                    <a:lstStyle/>
+                    <a:p>
+                      <a:pPr lvl="0" indent="0" marL="0">
+                        <a:buNone/>
+                      </a:pPr>
+                      <a:r>
+                        <a:rPr/>
+                        <a:t>Variable 1</a:t>
+                      </a:r>
+                    </a:p>
+                  </a:txBody>
+                  <a:tcPr/>
+                </a:tc>
+                <a:tc>
+                  <a:txBody>
+                    <a:bodyPr/>
+                    <a:lstStyle/>
+                    <a:p>
+                      <a:pPr lvl="0" indent="0" marL="0">
+                        <a:buNone/>
+                      </a:pPr>
+                      <a:r>
+                        <a:rPr/>
+                        <a:t>Variable 2</a:t>
+                      </a:r>
+                    </a:p>
+                  </a:txBody>
+                  <a:tcPr/>
+                </a:tc>
+              </a:tr>
+              <a:tr h="0">
+                <a:tc>
+                  <a:txBody>
+                    <a:bodyPr/>
+                    <a:lstStyle/>
+                    <a:p>
+                      <a:pPr lvl="0" indent="0" marL="0">
+                        <a:buNone/>
+                      </a:pPr>
+                      <a:r>
+                        <a:rPr/>
+                        <a:t>1</a:t>
+                      </a:r>
+                    </a:p>
+                  </a:txBody>
+                </a:tc>
+                <a:tc>
+                  <a:txBody>
+                    <a:bodyPr/>
+                    <a:lstStyle/>
+                    <a:p>
+                      <a:pPr lvl="0" indent="0" marL="0">
+                        <a:buNone/>
+                      </a:pPr>
+                      <a:r>
+                        <a:rPr/>
+                        <a:t>______</a:t>
+                      </a:r>
+                    </a:p>
+                  </a:txBody>
+                </a:tc>
+                <a:tc>
+                  <a:txBody>
+                    <a:bodyPr/>
+                    <a:lstStyle/>
+                    <a:p>
+                      <a:pPr lvl="0" indent="0" marL="0">
+                        <a:buNone/>
+                      </a:pPr>
+                      <a:r>
+                        <a:rPr/>
+                        <a:t>______</a:t>
+                      </a:r>
+                    </a:p>
+                  </a:txBody>
+                </a:tc>
+              </a:tr>
+              <a:tr h="0">
+                <a:tc>
+                  <a:txBody>
+                    <a:bodyPr/>
+                    <a:lstStyle/>
+                    <a:p>
+                      <a:pPr lvl="0" indent="0" marL="0">
+                        <a:buNone/>
+                      </a:pPr>
+                      <a:r>
+                        <a:rPr/>
+                        <a:t>2</a:t>
+                      </a:r>
+                    </a:p>
+                  </a:txBody>
+                </a:tc>
+                <a:tc>
+                  <a:txBody>
+                    <a:bodyPr/>
+                    <a:lstStyle/>
+                    <a:p>
+                      <a:pPr lvl="0" indent="0" marL="0">
+                        <a:buNone/>
+                      </a:pPr>
+                      <a:r>
+                        <a:rPr/>
+                        <a:t>______</a:t>
+                      </a:r>
+                    </a:p>
+                  </a:txBody>
+                </a:tc>
+                <a:tc>
+                  <a:txBody>
+                    <a:bodyPr/>
+                    <a:lstStyle/>
+                    <a:p>
+                      <a:pPr lvl="0" indent="0" marL="0">
+                        <a:buNone/>
+                      </a:pPr>
+                      <a:r>
+                        <a:rPr/>
+                        <a:t>______</a:t>
+                      </a:r>
+                    </a:p>
+                  </a:txBody>
+                </a:tc>
+              </a:tr>
+              <a:tr h="0">
+                <a:tc>
+                  <a:txBody>
+                    <a:bodyPr/>
+                    <a:lstStyle/>
+                    <a:p>
+                      <a:pPr lvl="0" indent="0" marL="0">
+                        <a:buNone/>
+                      </a:pPr>
+                      <a:r>
+                        <a:rPr/>
+                        <a:t>3</a:t>
+                      </a:r>
+                    </a:p>
+                  </a:txBody>
+                </a:tc>
+                <a:tc>
+                  <a:txBody>
+                    <a:bodyPr/>
+                    <a:lstStyle/>
+                    <a:p>
+                      <a:pPr lvl="0" indent="0" marL="0">
+                        <a:buNone/>
+                      </a:pPr>
+                      <a:r>
+                        <a:rPr/>
+                        <a:t>______</a:t>
+                      </a:r>
+                    </a:p>
+                  </a:txBody>
+                </a:tc>
+                <a:tc>
+                  <a:txBody>
+                    <a:bodyPr/>
+                    <a:lstStyle/>
+                    <a:p>
+                      <a:pPr lvl="0" indent="0" marL="0">
+                        <a:buNone/>
+                      </a:pPr>
+                      <a:r>
+                        <a:rPr/>
+                        <a:t>______</a:t>
+                      </a:r>
+                    </a:p>
+                  </a:txBody>
+                </a:tc>
+              </a:tr>
+            </a:tbl>
+          </a:graphicData>
+        </a:graphic>
+      </p:graphicFrame>
+    </p:spTree>
+  </p:cSld>
+</p:sld>
+</file>
+
+<file path=ppt/slides/slide24.xml><?xml version="1.0" encoding="utf-8"?>
+<p:sld xmlns:a="http://schemas.openxmlformats.org/drawingml/2006/main" xmlns:r="http://schemas.openxmlformats.org/officeDocument/2006/relationships" xmlns:p="http://schemas.openxmlformats.org/presentationml/2006/main">
+  <p:cSld>
+    <p:spTree>
+      <p:nvGrpSpPr>
+        <p:cNvPr id="1" name=""/>
+        <p:cNvGrpSpPr/>
+        <p:nvPr/>
+      </p:nvGrpSpPr>
+      <p:grpSpPr>
+        <a:xfrm>
+          <a:off x="0" y="0"/>
+          <a:ext cx="0" cy="0"/>
+          <a:chOff x="0" y="0"/>
+          <a:chExt cx="0" cy="0"/>
+        </a:xfrm>
+      </p:grpSpPr>
+      <p:sp>
+        <p:nvSpPr>
+          <p:cNvPr id="2" name="Title 1"/>
+          <p:cNvSpPr>
+            <a:spLocks noGrp="1"/>
+          </p:cNvSpPr>
+          <p:nvPr>
+            <p:ph type="title"/>
+          </p:nvPr>
+        </p:nvSpPr>
+        <p:spPr>
+          <a:xfrm>
+            <a:off x="1097280" y="964692"/>
+            <a:ext cx="9997440" cy="1188720"/>
+          </a:xfrm>
+        </p:spPr>
+        <p:txBody>
+          <a:bodyPr/>
+          <a:lstStyle/>
+          <a:p>
+            <a:pPr lvl="0" indent="0" marL="0">
+              <a:buNone/>
+            </a:pPr>
+            <a:r>
+              <a:rPr/>
+              <a:t>15 Choose two within-groups pairs</a:t>
+            </a:r>
+          </a:p>
+        </p:txBody>
+      </p:sp>
+      <p:sp>
+        <p:nvSpPr>
+          <p:cNvPr id="3" name="Content Placeholder 2"/>
+          <p:cNvSpPr>
+            <a:spLocks noGrp="1"/>
+          </p:cNvSpPr>
+          <p:nvPr>
+            <p:ph idx="1"/>
+          </p:nvPr>
+        </p:nvSpPr>
+        <p:spPr/>
+        <p:txBody>
+          <a:bodyPr/>
+          <a:lstStyle/>
+          <a:p>
+            <a:pPr lvl="0" indent="0" marL="0">
+              <a:buNone/>
+            </a:pPr>
+            <a:r>
+              <a:rPr/>
+              <a:t>Select two distinct pairs with comparable scales</a:t>
+            </a:r>
+          </a:p>
+          <a:p>
+            <a:pPr lvl="0" indent="0" marL="0">
+              <a:buNone/>
+            </a:pPr>
+            <a:r>
+              <a:rPr/>
+              <a:t>Choose 2 distinct pair(s) from: clark_grp, tomatometer, clark_height_in, lois_height_in, rt_critics_score, rt_audience_score.</a:t>
+            </a:r>
+          </a:p>
+        </p:txBody>
+      </p:sp>
+    </p:spTree>
+  </p:cSld>
+</p:sld>
+</file>
+
+<file path=ppt/slides/slide25.xml><?xml version="1.0" encoding="utf-8"?>
+<p:sld xmlns:a="http://schemas.openxmlformats.org/drawingml/2006/main" xmlns:r="http://schemas.openxmlformats.org/officeDocument/2006/relationships" xmlns:p="http://schemas.openxmlformats.org/presentationml/2006/main">
+  <p:cSld>
+    <p:spTree>
+      <p:nvGrpSpPr>
+        <p:cNvPr id="1" name=""/>
+        <p:cNvGrpSpPr/>
+        <p:nvPr/>
+      </p:nvGrpSpPr>
+      <p:grpSpPr>
+        <a:xfrm>
+          <a:off x="0" y="0"/>
+          <a:ext cx="0" cy="0"/>
+          <a:chOff x="0" y="0"/>
+          <a:chExt cx="0" cy="0"/>
+        </a:xfrm>
+      </p:grpSpPr>
+      <p:sp>
+        <p:nvSpPr>
+          <p:cNvPr id="2" name="Title 1"/>
+          <p:cNvSpPr>
+            <a:spLocks noGrp="1"/>
+          </p:cNvSpPr>
+          <p:nvPr>
+            <p:ph type="title"/>
+          </p:nvPr>
+        </p:nvSpPr>
+        <p:spPr>
+          <a:xfrm>
+            <a:off x="1097280" y="964692"/>
+            <a:ext cx="9997440" cy="1188720"/>
+          </a:xfrm>
+        </p:spPr>
+        <p:txBody>
+          <a:bodyPr/>
+          <a:lstStyle/>
+          <a:p>
+            <a:pPr lvl="0" indent="0" marL="0">
+              <a:buNone/>
+            </a:pPr>
+            <a:r>
+              <a:rPr/>
+              <a:t>15 Choose two within-groups pairs (continued)</a:t>
+            </a:r>
+          </a:p>
+        </p:txBody>
+      </p:sp>
+      <p:graphicFrame>
+        <p:nvGraphicFramePr>
+          <p:cNvPr id="6" name="Content Placeholder 5"/>
+          <p:cNvGraphicFramePr>
+            <a:graphicFrameLocks noGrp="1"/>
+          </p:cNvGraphicFramePr>
+          <p:nvPr>
+            <p:ph idx="1"/>
+          </p:nvPr>
+        </p:nvGraphicFramePr>
+        <p:xfrm>
+          <a:off x="1092200" y="2628900"/>
+          <a:ext cx="9994900" cy="3098800"/>
+        </p:xfrm>
+        <a:graphic>
+          <a:graphicData uri="http://schemas.openxmlformats.org/drawingml/2006/table">
+            <a:tbl>
+              <a:tblPr firstRow="1" bandRow="1">
+                <a:tableStyleId>{5C22544A-7EE6-4342-B048-85BDC9FD1C3A}</a:tableStyleId>
+              </a:tblPr>
+              <a:tblGrid>
+                <a:gridCol w="3327400"/>
+                <a:gridCol w="3327400"/>
+                <a:gridCol w="3327400"/>
+              </a:tblGrid>
+              <a:tr h="0">
+                <a:tc>
+                  <a:txBody>
+                    <a:bodyPr/>
+                    <a:lstStyle/>
+                    <a:p>
+                      <a:pPr lvl="0" indent="0" marL="0">
+                        <a:buNone/>
+                      </a:pPr>
+                      <a:r>
+                        <a:rPr/>
+                        <a:t>Pair</a:t>
+                      </a:r>
+                    </a:p>
+                  </a:txBody>
+                  <a:tcPr/>
+                </a:tc>
+                <a:tc>
+                  <a:txBody>
+                    <a:bodyPr/>
+                    <a:lstStyle/>
+                    <a:p>
+                      <a:pPr lvl="0" indent="0" marL="0">
+                        <a:buNone/>
+                      </a:pPr>
+                      <a:r>
+                        <a:rPr/>
+                        <a:t>Variable 1</a:t>
+                      </a:r>
+                    </a:p>
+                  </a:txBody>
+                  <a:tcPr/>
+                </a:tc>
+                <a:tc>
+                  <a:txBody>
+                    <a:bodyPr/>
+                    <a:lstStyle/>
+                    <a:p>
+                      <a:pPr lvl="0" indent="0" marL="0">
+                        <a:buNone/>
+                      </a:pPr>
+                      <a:r>
+                        <a:rPr/>
+                        <a:t>Variable 2</a:t>
+                      </a:r>
+                    </a:p>
+                  </a:txBody>
+                  <a:tcPr/>
+                </a:tc>
+              </a:tr>
+              <a:tr h="0">
+                <a:tc>
+                  <a:txBody>
+                    <a:bodyPr/>
+                    <a:lstStyle/>
+                    <a:p>
+                      <a:pPr lvl="0" indent="0" marL="0">
+                        <a:buNone/>
+                      </a:pPr>
+                      <a:r>
+                        <a:rPr/>
+                        <a:t>1</a:t>
+                      </a:r>
+                    </a:p>
+                  </a:txBody>
+                </a:tc>
+                <a:tc>
+                  <a:txBody>
+                    <a:bodyPr/>
+                    <a:lstStyle/>
+                    <a:p>
+                      <a:pPr lvl="0" indent="0" marL="0">
+                        <a:buNone/>
+                      </a:pPr>
+                      <a:r>
+                        <a:rPr/>
+                        <a:t>______</a:t>
+                      </a:r>
+                    </a:p>
+                  </a:txBody>
+                </a:tc>
+                <a:tc>
+                  <a:txBody>
+                    <a:bodyPr/>
+                    <a:lstStyle/>
+                    <a:p>
+                      <a:pPr lvl="0" indent="0" marL="0">
+                        <a:buNone/>
+                      </a:pPr>
+                      <a:r>
+                        <a:rPr/>
+                        <a:t>______</a:t>
+                      </a:r>
+                    </a:p>
+                  </a:txBody>
+                </a:tc>
+              </a:tr>
+              <a:tr h="0">
+                <a:tc>
+                  <a:txBody>
+                    <a:bodyPr/>
+                    <a:lstStyle/>
+                    <a:p>
+                      <a:pPr lvl="0" indent="0" marL="0">
+                        <a:buNone/>
+                      </a:pPr>
+                      <a:r>
+                        <a:rPr/>
+                        <a:t>2</a:t>
+                      </a:r>
+                    </a:p>
+                  </a:txBody>
+                </a:tc>
+                <a:tc>
+                  <a:txBody>
+                    <a:bodyPr/>
+                    <a:lstStyle/>
+                    <a:p>
+                      <a:pPr lvl="0" indent="0" marL="0">
+                        <a:buNone/>
+                      </a:pPr>
+                      <a:r>
+                        <a:rPr/>
+                        <a:t>______</a:t>
+                      </a:r>
+                    </a:p>
+                  </a:txBody>
+                </a:tc>
+                <a:tc>
+                  <a:txBody>
+                    <a:bodyPr/>
+                    <a:lstStyle/>
+                    <a:p>
+                      <a:pPr lvl="0" indent="0" marL="0">
+                        <a:buNone/>
+                      </a:pPr>
+                      <a:r>
+                        <a:rPr/>
+                        <a:t>______</a:t>
+                      </a:r>
+                    </a:p>
+                  </a:txBody>
+                </a:tc>
+              </a:tr>
+            </a:tbl>
+          </a:graphicData>
+        </a:graphic>
+      </p:graphicFrame>
+    </p:spTree>
+  </p:cSld>
+</p:sld>
+</file>
+
+<file path=ppt/slides/slide26.xml><?xml version="1.0" encoding="utf-8"?>
+<p:sld xmlns:a="http://schemas.openxmlformats.org/drawingml/2006/main" xmlns:r="http://schemas.openxmlformats.org/officeDocument/2006/relationships" xmlns:p="http://schemas.openxmlformats.org/presentationml/2006/main">
+  <p:cSld>
+    <p:spTree>
+      <p:nvGrpSpPr>
+        <p:cNvPr id="1" name=""/>
+        <p:cNvGrpSpPr/>
+        <p:nvPr/>
+      </p:nvGrpSpPr>
+      <p:grpSpPr>
+        <a:xfrm>
+          <a:off x="0" y="0"/>
+          <a:ext cx="0" cy="0"/>
+          <a:chOff x="0" y="0"/>
+          <a:chExt cx="0" cy="0"/>
+        </a:xfrm>
+      </p:grpSpPr>
+      <p:sp>
+        <p:nvSpPr>
+          <p:cNvPr id="2" name="Title 1"/>
+          <p:cNvSpPr>
+            <a:spLocks noGrp="1"/>
+          </p:cNvSpPr>
+          <p:nvPr>
+            <p:ph type="title"/>
+          </p:nvPr>
+        </p:nvSpPr>
+        <p:spPr>
+          <a:xfrm>
+            <a:off x="1097280" y="964692"/>
+            <a:ext cx="9997440" cy="1188720"/>
+          </a:xfrm>
+        </p:spPr>
+        <p:txBody>
+          <a:bodyPr/>
+          <a:lstStyle/>
+          <a:p>
+            <a:pPr lvl="0" indent="0" marL="0">
+              <a:buNone/>
+            </a:pPr>
+            <a:r>
+              <a:rPr/>
+              <a:t>16 Write the four hypotheses</a:t>
+            </a:r>
+          </a:p>
+        </p:txBody>
+      </p:sp>
+      <p:sp>
+        <p:nvSpPr>
+          <p:cNvPr id="3" name="Content Placeholder 2"/>
+          <p:cNvSpPr>
+            <a:spLocks noGrp="1"/>
+          </p:cNvSpPr>
+          <p:nvPr>
+            <p:ph idx="1"/>
+          </p:nvPr>
+        </p:nvSpPr>
+        <p:spPr/>
+        <p:txBody>
+          <a:bodyPr/>
+          <a:lstStyle/>
+          <a:p>
+            <a:pPr lvl="0" indent="0" marL="0">
+              <a:buNone/>
+            </a:pPr>
+            <a:r>
+              <a:rPr/>
+              <a:t>[RH1–RH4]</a:t>
+            </a:r>
+          </a:p>
+          <a:p>
+            <a:pPr lvl="0" indent="0" marL="0">
+              <a:buNone/>
+            </a:pPr>
+            <a:r>
+              <a:rPr/>
+              <a:t>For each core-variable pair, identify:</a:t>
+            </a:r>
+          </a:p>
           <a:p>
             <a:pPr lvl="0"/>
             <a:r>
+              <a:rPr/>
+              <a:t>The two variable types</a:t>
+            </a:r>
+          </a:p>
+          <a:p>
+            <a:pPr lvl="0"/>
+            <a:r>
+              <a:rPr/>
+              <a:t>The statistic you will use</a:t>
+            </a:r>
+          </a:p>
+          <a:p>
+            <a:pPr lvl="0"/>
+            <a:r>
+              <a:rPr/>
+              <a:t>The direction you predict</a:t>
+            </a:r>
+          </a:p>
+          <a:p>
+            <a:pPr lvl="0" indent="0" marL="0">
+              <a:buNone/>
+            </a:pPr>
+            <a:r>
               <a:rPr b="1"/>
-              <a:t>Worksheet:</a:t>
-            </a:r>
+              <a:t>Name the variables and say what you expect</a:t>
+            </a:r>
+          </a:p>
+        </p:txBody>
+      </p:sp>
+    </p:spTree>
+  </p:cSld>
+</p:sld>
+</file>
+
+<file path=ppt/slides/slide27.xml><?xml version="1.0" encoding="utf-8"?>
+<p:sld xmlns:a="http://schemas.openxmlformats.org/drawingml/2006/main" xmlns:r="http://schemas.openxmlformats.org/officeDocument/2006/relationships" xmlns:p="http://schemas.openxmlformats.org/presentationml/2006/main">
+  <p:cSld>
+    <p:spTree>
+      <p:nvGrpSpPr>
+        <p:cNvPr id="1" name=""/>
+        <p:cNvGrpSpPr/>
+        <p:nvPr/>
+      </p:nvGrpSpPr>
+      <p:grpSpPr>
+        <a:xfrm>
+          <a:off x="0" y="0"/>
+          <a:ext cx="0" cy="0"/>
+          <a:chOff x="0" y="0"/>
+          <a:chExt cx="0" cy="0"/>
+        </a:xfrm>
+      </p:grpSpPr>
+      <p:sp>
+        <p:nvSpPr>
+          <p:cNvPr id="2" name="Title 1"/>
+          <p:cNvSpPr>
+            <a:spLocks noGrp="1"/>
+          </p:cNvSpPr>
+          <p:nvPr>
+            <p:ph type="title"/>
+          </p:nvPr>
+        </p:nvSpPr>
+        <p:spPr>
+          <a:xfrm>
+            <a:off x="1097280" y="964692"/>
+            <a:ext cx="9997440" cy="1188720"/>
+          </a:xfrm>
+        </p:spPr>
+        <p:txBody>
+          <a:bodyPr/>
+          <a:lstStyle/>
+          <a:p>
+            <a:pPr lvl="0" indent="0" marL="0">
+              <a:buNone/>
+            </a:pPr>
             <a:r>
               <a:rPr/>
-              <a:t> Lab 09 Project RH Proposal</a:t>
-            </a:r>
-          </a:p>
-          <a:p>
-            <a:pPr lvl="0"/>
-            <a:r>
-              <a:rPr b="1"/>
-              <a:t>Project data:</a:t>
-            </a:r>
-            <a:r>
-              <a:rPr/>
-              <a:t> selected course dataset</a:t>
-            </a:r>
-          </a:p>
-          <a:p>
-            <a:pPr lvl="0"/>
-            <a:r>
-              <a:rPr b="1"/>
-              <a:t>Sources:</a:t>
-            </a:r>
-            <a:r>
-              <a:rPr/>
-              <a:t> three or more empirical articles</a:t>
-            </a:r>
-          </a:p>
-          <a:p>
-            <a:pPr lvl="0"/>
-            <a:r>
-              <a:rPr b="1"/>
-              <a:t>Earlier work:</a:t>
-            </a:r>
-            <a:r>
-              <a:rPr/>
-              <a:t> search collection and variable notes</a:t>
-            </a:r>
-          </a:p>
-          <a:p>
-            <a:pPr lvl="0" indent="0" marL="0">
-              <a:buNone/>
-            </a:pPr>
-            <a:r>
-              <a:rPr/>
-              <a:t>Today’s path: </a:t>
-            </a:r>
-            <a:r>
-              <a:rPr b="1"/>
-              <a:t>select → prepare → predict → justify → document</a:t>
-            </a:r>
-          </a:p>
-        </p:txBody>
-      </p:sp>
-      <p:pic>
-        <p:nvPicPr>
-          <p:cNvPr descr="A humorous film still about reading documents, used to introduce the evidence-building work in the project preproposal" id="0" name="Picture 1"/>
-          <p:cNvPicPr>
-            <a:picLocks noGrp="1" noChangeAspect="1"/>
-          </p:cNvPicPr>
+              <a:t>17 Read three articles for your project</a:t>
+            </a:r>
+          </a:p>
+        </p:txBody>
+      </p:sp>
+      <p:sp>
+        <p:nvSpPr>
+          <p:cNvPr id="1005" name="prose" descr=""/>
+          <p:cNvSpPr/>
           <p:nvPr/>
-        </p:nvPicPr>
-        <p:blipFill>
-          <a:blip r:embed="rId3"/>
-          <a:stretch>
-            <a:fillRect/>
-          </a:stretch>
-        </p:blipFill>
-        <p:spPr bwMode="auto">
+        </p:nvSpPr>
+        <p:spPr>
           <a:xfrm>
-            <a:off x="7073900" y="2628900"/>
-            <a:ext cx="3111500" cy="3098800"/>
+            <a:off x="1097280" y="2633472"/>
+            <a:ext cx="9994392" cy="304800"/>
           </a:xfrm>
-          <a:prstGeom prst="rect">
-            <a:avLst/>
+          <a:prstGeom prst="roundRect">
+            <a:avLst>
+              <a:gd name="adj" fmla="val 6000"/>
+            </a:avLst>
           </a:prstGeom>
           <a:noFill/>
-          <a:ln w="9525">
+          <a:ln>
             <a:noFill/>
-            <a:headEnd/>
-            <a:tailEnd/>
           </a:ln>
         </p:spPr>
-      </p:pic>
+        <p:txBody>
+          <a:bodyPr lIns="182880" tIns="0" rIns="182880" bIns="0" anchor="t" wrap="square">
+            <a:normAutofit/>
+          </a:bodyPr>
+          <a:lstStyle/>
+          <a:p>
+            <a:pPr algn="l"/>
+            <a:r>
+              <a:rPr lang="en-US" sz="2000" b="0" dirty="0">
+                <a:solidFill>
+                  <a:srgbClr val="010B13"/>
+                </a:solidFill>
+              </a:rPr>
+              <a:t>[References 1–3]</a:t>
+            </a:r>
+          </a:p>
+        </p:txBody>
+      </p:sp>
+      <p:sp>
+        <p:nvSpPr>
+          <p:cNvPr id="1006" name="card-steel" descr="card: What was studied?. • In-text citation and research question • Target population and sample • Design, procedures, and variables"/>
+          <p:cNvSpPr/>
+          <p:nvPr/>
+        </p:nvSpPr>
+        <p:spPr>
+          <a:xfrm>
+            <a:off x="1097280" y="3084576"/>
+            <a:ext cx="4924044" cy="2529840"/>
+          </a:xfrm>
+          <a:prstGeom prst="roundRect">
+            <a:avLst>
+              <a:gd name="adj" fmla="val 6000"/>
+            </a:avLst>
+          </a:prstGeom>
+          <a:solidFill>
+            <a:srgbClr val="FEFDFA"/>
+          </a:solidFill>
+          <a:ln w="19050">
+            <a:solidFill>
+              <a:srgbClr val="CCCCCC"/>
+            </a:solidFill>
+          </a:ln>
+        </p:spPr>
+        <p:txBody>
+          <a:bodyPr lIns="182880" tIns="182880" rIns="182880" bIns="182880" anchor="t" wrap="square">
+            <a:normAutofit/>
+          </a:bodyPr>
+          <a:lstStyle/>
+          <a:p>
+            <a:pPr algn="l"/>
+            <a:r>
+              <a:rPr lang="en-US" sz="2200" b="1" dirty="0">
+                <a:solidFill>
+                  <a:srgbClr val="010B13"/>
+                </a:solidFill>
+              </a:rPr>
+              <a:t>What was studied?</a:t>
+            </a:r>
+          </a:p>
+          <a:p>
+            <a:pPr algn="l"/>
+            <a:r>
+              <a:rPr lang="en-US" sz="2000" b="0" dirty="0">
+                <a:solidFill>
+                  <a:srgbClr val="010B13"/>
+                </a:solidFill>
+              </a:rPr>
+              <a:t>• In-text citation and research question</a:t>
+            </a:r>
+          </a:p>
+          <a:p>
+            <a:pPr algn="l"/>
+            <a:r>
+              <a:rPr lang="en-US" sz="2000" b="0" dirty="0">
+                <a:solidFill>
+                  <a:srgbClr val="010B13"/>
+                </a:solidFill>
+              </a:rPr>
+              <a:t>• Target population and sample</a:t>
+            </a:r>
+          </a:p>
+          <a:p>
+            <a:pPr algn="l"/>
+            <a:r>
+              <a:rPr lang="en-US" sz="2000" b="0" dirty="0">
+                <a:solidFill>
+                  <a:srgbClr val="010B13"/>
+                </a:solidFill>
+              </a:rPr>
+              <a:t>• Design, procedures, and variables</a:t>
+            </a:r>
+          </a:p>
+        </p:txBody>
+      </p:sp>
+      <p:sp>
+        <p:nvSpPr>
+          <p:cNvPr id="1007" name="card-rail" descr="">
+            <a:extLst>
+              <a:ext uri="{C183D7F6-B498-43B3-948B-1728B52AA6E4}">
+                <adec:decorative xmlns:adec="http://schemas.microsoft.com/office/drawing/2017/decorative" val="1"/>
+              </a:ext>
+            </a:extLst>
+          </p:cNvPr>
+          <p:cNvSpPr/>
+          <p:nvPr/>
+        </p:nvSpPr>
+        <p:spPr>
+          <a:xfrm>
+            <a:off x="1097280" y="3084576"/>
+            <a:ext cx="54864" cy="2529840"/>
+          </a:xfrm>
+          <a:prstGeom prst="roundRect">
+            <a:avLst>
+              <a:gd name="adj" fmla="val 20000"/>
+            </a:avLst>
+          </a:prstGeom>
+          <a:solidFill>
+            <a:srgbClr val="010B13"/>
+          </a:solidFill>
+          <a:ln>
+            <a:noFill/>
+          </a:ln>
+        </p:spPr>
+        <p:txBody>
+          <a:bodyPr lIns="182880" tIns="182880" rIns="182880" bIns="182880" anchor="t" wrap="square">
+            <a:normAutofit/>
+          </a:bodyPr>
+          <a:lstStyle/>
+          <a:p/>
+        </p:txBody>
+      </p:sp>
+      <p:sp>
+        <p:nvSpPr>
+          <p:cNvPr id="1008" name="card-steel" descr="card: What did it show?. • Major findings • Relevance to your project variables"/>
+          <p:cNvSpPr/>
+          <p:nvPr/>
+        </p:nvSpPr>
+        <p:spPr>
+          <a:xfrm>
+            <a:off x="6167628" y="3084576"/>
+            <a:ext cx="4924044" cy="1615440"/>
+          </a:xfrm>
+          <a:prstGeom prst="roundRect">
+            <a:avLst>
+              <a:gd name="adj" fmla="val 6000"/>
+            </a:avLst>
+          </a:prstGeom>
+          <a:solidFill>
+            <a:srgbClr val="FEFDFA"/>
+          </a:solidFill>
+          <a:ln w="19050">
+            <a:solidFill>
+              <a:srgbClr val="CCCCCC"/>
+            </a:solidFill>
+          </a:ln>
+        </p:spPr>
+        <p:txBody>
+          <a:bodyPr lIns="182880" tIns="182880" rIns="182880" bIns="182880" anchor="t" wrap="square">
+            <a:normAutofit/>
+          </a:bodyPr>
+          <a:lstStyle/>
+          <a:p>
+            <a:pPr algn="l"/>
+            <a:r>
+              <a:rPr lang="en-US" sz="2200" b="1" dirty="0">
+                <a:solidFill>
+                  <a:srgbClr val="010B13"/>
+                </a:solidFill>
+              </a:rPr>
+              <a:t>What did it show?</a:t>
+            </a:r>
+          </a:p>
+          <a:p>
+            <a:pPr algn="l"/>
+            <a:r>
+              <a:rPr lang="en-US" sz="2000" b="0" dirty="0">
+                <a:solidFill>
+                  <a:srgbClr val="010B13"/>
+                </a:solidFill>
+              </a:rPr>
+              <a:t>• Major findings</a:t>
+            </a:r>
+          </a:p>
+          <a:p>
+            <a:pPr algn="l"/>
+            <a:r>
+              <a:rPr lang="en-US" sz="2000" b="0" dirty="0">
+                <a:solidFill>
+                  <a:srgbClr val="010B13"/>
+                </a:solidFill>
+              </a:rPr>
+              <a:t>• Relevance to your project variables</a:t>
+            </a:r>
+          </a:p>
+        </p:txBody>
+      </p:sp>
+      <p:sp>
+        <p:nvSpPr>
+          <p:cNvPr id="1009" name="card-rail" descr="">
+            <a:extLst>
+              <a:ext uri="{C183D7F6-B498-43B3-948B-1728B52AA6E4}">
+                <adec:decorative xmlns:adec="http://schemas.microsoft.com/office/drawing/2017/decorative" val="1"/>
+              </a:ext>
+            </a:extLst>
+          </p:cNvPr>
+          <p:cNvSpPr/>
+          <p:nvPr/>
+        </p:nvSpPr>
+        <p:spPr>
+          <a:xfrm>
+            <a:off x="6167628" y="3084576"/>
+            <a:ext cx="54864" cy="1615440"/>
+          </a:xfrm>
+          <a:prstGeom prst="roundRect">
+            <a:avLst>
+              <a:gd name="adj" fmla="val 20000"/>
+            </a:avLst>
+          </a:prstGeom>
+          <a:solidFill>
+            <a:srgbClr val="010B13"/>
+          </a:solidFill>
+          <a:ln>
+            <a:noFill/>
+          </a:ln>
+        </p:spPr>
+        <p:txBody>
+          <a:bodyPr lIns="182880" tIns="182880" rIns="182880" bIns="182880" anchor="t" wrap="square">
+            <a:normAutofit/>
+          </a:bodyPr>
+          <a:lstStyle/>
+          <a:p/>
+        </p:txBody>
+      </p:sp>
+    </p:spTree>
+  </p:cSld>
+</p:sld>
+</file>
+
+<file path=ppt/slides/slide28.xml><?xml version="1.0" encoding="utf-8"?>
+<p:sld xmlns:a="http://schemas.openxmlformats.org/drawingml/2006/main" xmlns:r="http://schemas.openxmlformats.org/officeDocument/2006/relationships" xmlns:p="http://schemas.openxmlformats.org/presentationml/2006/main">
+  <p:cSld>
+    <p:spTree>
+      <p:nvGrpSpPr>
+        <p:cNvPr id="1" name=""/>
+        <p:cNvGrpSpPr/>
+        <p:nvPr/>
+      </p:nvGrpSpPr>
+      <p:grpSpPr>
+        <a:xfrm>
+          <a:off x="0" y="0"/>
+          <a:ext cx="0" cy="0"/>
+          <a:chOff x="0" y="0"/>
+          <a:chExt cx="0" cy="0"/>
+        </a:xfrm>
+      </p:grpSpPr>
+      <p:sp>
+        <p:nvSpPr>
+          <p:cNvPr id="2" name="Title 1"/>
+          <p:cNvSpPr>
+            <a:spLocks noGrp="1"/>
+          </p:cNvSpPr>
+          <p:nvPr>
+            <p:ph type="title"/>
+          </p:nvPr>
+        </p:nvSpPr>
+        <p:spPr>
+          <a:xfrm>
+            <a:off x="1097280" y="964692"/>
+            <a:ext cx="9997440" cy="1188720"/>
+          </a:xfrm>
+        </p:spPr>
+        <p:txBody>
+          <a:bodyPr/>
+          <a:lstStyle/>
+          <a:p>
+            <a:pPr lvl="0" indent="0" marL="0">
+              <a:buNone/>
+            </a:pPr>
+            <a:r>
+              <a:rPr/>
+              <a:t>18 Explain how the findings support your RHs</a:t>
+            </a:r>
+          </a:p>
+        </p:txBody>
+      </p:sp>
+      <p:sp>
+        <p:nvSpPr>
+          <p:cNvPr id="3" name="Content Placeholder 2"/>
+          <p:cNvSpPr>
+            <a:spLocks noGrp="1"/>
+          </p:cNvSpPr>
+          <p:nvPr>
+            <p:ph idx="1"/>
+          </p:nvPr>
+        </p:nvSpPr>
+        <p:spPr/>
+        <p:txBody>
+          <a:bodyPr/>
+          <a:lstStyle/>
+          <a:p>
+            <a:pPr lvl="0" indent="0" marL="0">
+              <a:buNone/>
+            </a:pPr>
+            <a:r>
+              <a:rPr/>
+              <a:t>For each proposed relationship, ask:</a:t>
+            </a:r>
+          </a:p>
+          <a:p>
+            <a:pPr lvl="0"/>
+            <a:r>
+              <a:rPr/>
+              <a:t>Which finding helps explain your prediction?</a:t>
+            </a:r>
+          </a:p>
+          <a:p>
+            <a:pPr lvl="0"/>
+            <a:r>
+              <a:rPr/>
+              <a:t>Is the construct measured in a similar way?</a:t>
+            </a:r>
+          </a:p>
+          <a:p>
+            <a:pPr lvl="0"/>
+            <a:r>
+              <a:rPr/>
+              <a:t>What differs in the sample or design?</a:t>
+            </a:r>
+          </a:p>
+        </p:txBody>
+      </p:sp>
+    </p:spTree>
+  </p:cSld>
+</p:sld>
+</file>
+
+<file path=ppt/slides/slide29.xml><?xml version="1.0" encoding="utf-8"?>
+<p:sld xmlns:a="http://schemas.openxmlformats.org/drawingml/2006/main" xmlns:r="http://schemas.openxmlformats.org/officeDocument/2006/relationships" xmlns:p="http://schemas.openxmlformats.org/presentationml/2006/main">
+  <p:cSld>
+    <p:spTree>
+      <p:nvGrpSpPr>
+        <p:cNvPr id="1" name=""/>
+        <p:cNvGrpSpPr/>
+        <p:nvPr/>
+      </p:nvGrpSpPr>
+      <p:grpSpPr>
+        <a:xfrm>
+          <a:off x="0" y="0"/>
+          <a:ext cx="0" cy="0"/>
+          <a:chOff x="0" y="0"/>
+          <a:chExt cx="0" cy="0"/>
+        </a:xfrm>
+      </p:grpSpPr>
+      <p:sp>
+        <p:nvSpPr>
+          <p:cNvPr id="2" name="Title 1"/>
+          <p:cNvSpPr>
+            <a:spLocks noGrp="1"/>
+          </p:cNvSpPr>
+          <p:nvPr>
+            <p:ph type="title"/>
+          </p:nvPr>
+        </p:nvSpPr>
+        <p:spPr>
+          <a:xfrm>
+            <a:off x="1097280" y="964692"/>
+            <a:ext cx="9997440" cy="1188720"/>
+          </a:xfrm>
+        </p:spPr>
+        <p:txBody>
+          <a:bodyPr/>
+          <a:lstStyle/>
+          <a:p>
+            <a:pPr lvl="0" indent="0" marL="0">
+              <a:buNone/>
+            </a:pPr>
+            <a:r>
+              <a:rPr/>
+              <a:t>19 Finish the analysis proposal</a:t>
+            </a:r>
+          </a:p>
+        </p:txBody>
+      </p:sp>
+      <p:sp>
+        <p:nvSpPr>
+          <p:cNvPr id="3" name="Content Placeholder 2"/>
+          <p:cNvSpPr>
+            <a:spLocks noGrp="1"/>
+          </p:cNvSpPr>
+          <p:nvPr>
+            <p:ph idx="1"/>
+          </p:nvPr>
+        </p:nvSpPr>
+        <p:spPr/>
+        <p:txBody>
+          <a:bodyPr/>
+          <a:lstStyle/>
+          <a:p>
+            <a:pPr lvl="0"/>
+            <a:r>
+              <a:rPr/>
+              <a:t>Complete the variable selection and recoding table</a:t>
+            </a:r>
+          </a:p>
+          <a:p>
+            <a:pPr lvl="0"/>
+            <a:r>
+              <a:rPr/>
+              <a:t>State four RHs with their variable types and tests</a:t>
+            </a:r>
+          </a:p>
+          <a:p>
+            <a:pPr lvl="0"/>
+            <a:r>
+              <a:rPr/>
+              <a:t>Complete the three article summaries</a:t>
+            </a:r>
+          </a:p>
+          <a:p>
+            <a:pPr lvl="0" indent="0" marL="0">
+              <a:buNone/>
+            </a:pPr>
+            <a:r>
+              <a:rPr b="1"/>
+              <a:t>Have your lab instructor sign off on the analysis plan</a:t>
+            </a:r>
+          </a:p>
+        </p:txBody>
+      </p:sp>
     </p:spTree>
   </p:cSld>
 </p:sld>
@@ -5900,7 +8672,7 @@
             </a:pPr>
             <a:r>
               <a:rPr/>
-              <a:t>2 The preproposal is a blueprint</a:t>
+              <a:t>2 Build around your core variable</a:t>
             </a:r>
           </a:p>
         </p:txBody>
@@ -5920,71 +8692,42 @@
           <a:bodyPr/>
           <a:lstStyle/>
           <a:p>
-            <a:pPr lvl="0" indent="-457200" marL="457200">
-              <a:buAutoNum type="arabicPeriod"/>
+            <a:pPr lvl="0" indent="0" marL="0">
+              <a:buNone/>
             </a:pPr>
             <a:r>
               <a:rPr/>
-              <a:t>Name the core </a:t>
-            </a:r>
+              <a:t>[Variable selection]</a:t>
+            </a:r>
+          </a:p>
+          <a:p>
+            <a:pPr lvl="0" indent="0" marL="0">
+              <a:buNone/>
+            </a:pPr>
             <a:r>
               <a:rPr b="1"/>
-              <a:t>construct</a:t>
-            </a:r>
+              <a:t>What does your core variable measure?</a:t>
+            </a:r>
+          </a:p>
+          <a:p>
+            <a:pPr lvl="0"/>
             <a:r>
               <a:rPr/>
-              <a:t>.</a:t>
-            </a:r>
-          </a:p>
-          <a:p>
-            <a:pPr lvl="0" indent="-457200" marL="457200">
-              <a:buAutoNum type="arabicPeriod"/>
-            </a:pPr>
+              <a:t>Name the dataset and core variable</a:t>
+            </a:r>
+          </a:p>
+          <a:p>
+            <a:pPr lvl="0"/>
             <a:r>
               <a:rPr/>
-              <a:t>Define each </a:t>
-            </a:r>
-            <a:r>
-              <a:rPr b="1"/>
-              <a:t>measure</a:t>
-            </a:r>
+              <a:t>Identify four other variables to examine with it</a:t>
+            </a:r>
+          </a:p>
+          <a:p>
+            <a:pPr lvl="0"/>
             <a:r>
               <a:rPr/>
-              <a:t>.</a:t>
-            </a:r>
-          </a:p>
-          <a:p>
-            <a:pPr lvl="0" indent="-457200" marL="457200">
-              <a:buAutoNum type="arabicPeriod"/>
-            </a:pPr>
-            <a:r>
-              <a:rPr/>
-              <a:t>State four </a:t>
-            </a:r>
-            <a:r>
-              <a:rPr b="1"/>
-              <a:t>predictions</a:t>
-            </a:r>
-            <a:r>
-              <a:rPr/>
-              <a:t>.</a:t>
-            </a:r>
-          </a:p>
-          <a:p>
-            <a:pPr lvl="0" indent="-457200" marL="457200">
-              <a:buAutoNum type="arabicPeriod"/>
-            </a:pPr>
-            <a:r>
-              <a:rPr/>
-              <a:t>Connect the </a:t>
-            </a:r>
-            <a:r>
-              <a:rPr b="1"/>
-              <a:t>evidence</a:t>
-            </a:r>
-            <a:r>
-              <a:rPr/>
-              <a:t>.</a:t>
+              <a:t>Enter their exact names in the worksheet</a:t>
             </a:r>
           </a:p>
         </p:txBody>
@@ -6036,157 +8779,14 @@
             </a:pPr>
             <a:r>
               <a:rPr/>
-              <a:t>3 Anchor the project in one variable</a:t>
+              <a:t>3 Check what each code means</a:t>
             </a:r>
           </a:p>
         </p:txBody>
       </p:sp>
       <p:pic>
         <p:nvPicPr>
-          <p:cNvPr descr="Participant speaking directly to the camera in a reality-television confessional, illustrating a measurable core project construct" id="0" name="Picture 1"/>
-          <p:cNvPicPr>
-            <a:picLocks noGrp="1" noChangeAspect="1"/>
-          </p:cNvPicPr>
-          <p:nvPr/>
-        </p:nvPicPr>
-        <p:blipFill>
-          <a:blip r:embed="rId3"/>
-          <a:stretch>
-            <a:fillRect/>
-          </a:stretch>
-        </p:blipFill>
-        <p:spPr bwMode="auto">
-          <a:xfrm>
-            <a:off x="2095500" y="2628900"/>
-            <a:ext cx="2882900" cy="3098800"/>
-          </a:xfrm>
-          <a:prstGeom prst="rect">
-            <a:avLst/>
-          </a:prstGeom>
-          <a:noFill/>
-          <a:ln w="9525">
-            <a:noFill/>
-            <a:headEnd/>
-            <a:tailEnd/>
-          </a:ln>
-        </p:spPr>
-      </p:pic>
-      <p:sp>
-        <p:nvSpPr>
-          <p:cNvPr id="4" name="Content Placeholder 3"/>
-          <p:cNvSpPr>
-            <a:spLocks noGrp="1"/>
-          </p:cNvSpPr>
-          <p:nvPr>
-            <p:ph idx="2" sz="half"/>
-          </p:nvPr>
-        </p:nvSpPr>
-        <p:spPr/>
-        <p:txBody>
-          <a:bodyPr/>
-          <a:lstStyle/>
-          <a:p>
-            <a:pPr lvl="0"/>
-            <a:r>
-              <a:rPr/>
-              <a:t>Choose one </a:t>
-            </a:r>
-            <a:r>
-              <a:rPr b="1"/>
-              <a:t>core variable</a:t>
-            </a:r>
-            <a:r>
-              <a:rPr/>
-              <a:t>.</a:t>
-            </a:r>
-          </a:p>
-          <a:p>
-            <a:pPr lvl="0"/>
-            <a:r>
-              <a:rPr/>
-              <a:t>Name the psychological construct.</a:t>
-            </a:r>
-          </a:p>
-          <a:p>
-            <a:pPr lvl="0"/>
-            <a:r>
-              <a:rPr/>
-              <a:t>Explain how the dataset measures it.</a:t>
-            </a:r>
-          </a:p>
-          <a:p>
-            <a:pPr lvl="0"/>
-            <a:r>
-              <a:rPr/>
-              <a:t>Keep the construct distinct from its scale name.</a:t>
-            </a:r>
-          </a:p>
-          <a:p>
-            <a:pPr lvl="0" indent="0" marL="0">
-              <a:buNone/>
-            </a:pPr>
-            <a:r>
-              <a:rPr/>
-              <a:t>Construct ≠ column name</a:t>
-            </a:r>
-          </a:p>
-        </p:txBody>
-      </p:sp>
-    </p:spTree>
-  </p:cSld>
-</p:sld>
-</file>
-
-<file path=ppt/slides/slide5.xml><?xml version="1.0" encoding="utf-8"?>
-<p:sld xmlns:a="http://schemas.openxmlformats.org/drawingml/2006/main" xmlns:r="http://schemas.openxmlformats.org/officeDocument/2006/relationships" xmlns:p="http://schemas.openxmlformats.org/presentationml/2006/main">
-  <p:cSld>
-    <p:spTree>
-      <p:nvGrpSpPr>
-        <p:cNvPr id="1" name=""/>
-        <p:cNvGrpSpPr/>
-        <p:nvPr/>
-      </p:nvGrpSpPr>
-      <p:grpSpPr>
-        <a:xfrm>
-          <a:off x="0" y="0"/>
-          <a:ext cx="0" cy="0"/>
-          <a:chOff x="0" y="0"/>
-          <a:chExt cx="0" cy="0"/>
-        </a:xfrm>
-      </p:grpSpPr>
-      <p:sp>
-        <p:nvSpPr>
-          <p:cNvPr id="2" name="Title 1"/>
-          <p:cNvSpPr>
-            <a:spLocks noGrp="1"/>
-          </p:cNvSpPr>
-          <p:nvPr>
-            <p:ph type="title"/>
-          </p:nvPr>
-        </p:nvSpPr>
-        <p:spPr>
-          <a:xfrm>
-            <a:off x="1097280" y="964692"/>
-            <a:ext cx="9997440" cy="1188720"/>
-          </a:xfrm>
-        </p:spPr>
-        <p:txBody>
-          <a:bodyPr/>
-          <a:lstStyle/>
-          <a:p>
-            <a:pPr lvl="0" indent="0" marL="0">
-              <a:buNone/>
-            </a:pPr>
-            <a:r>
-              <a:rPr/>
-              <a:t>4 Audit every selected variable</a:t>
-            </a:r>
-          </a:p>
-        </p:txBody>
-      </p:sp>
-      <p:pic>
-        <p:nvPicPr>
-          <p:cNvPr descr="A playful one-to-nine duck mood scale illustrating why response values need clear and interpretable labels" id="0" name="Picture 1"/>
+          <p:cNvPr descr="A joking 1-to-9 rubber duck scale asks how things are today. Nine numbered photographs show a giant yellow duck upright, leaning, and deflating, without defining what the numbers measure." id="0" name="Picture 1"/>
           <p:cNvPicPr>
             <a:picLocks noGrp="1" noChangeAspect="1"/>
           </p:cNvPicPr>
@@ -6234,42 +8834,142 @@
             </a:pPr>
             <a:r>
               <a:rPr/>
-              <a:t>For the core variable and every partner variable, verify:</a:t>
+              <a:t>Check each selected variable:</a:t>
             </a:r>
           </a:p>
           <a:p>
             <a:pPr lvl="0"/>
             <a:r>
               <a:rPr/>
-              <a:t>readable label</a:t>
+              <a:t>What do its values mean?</a:t>
             </a:r>
           </a:p>
           <a:p>
             <a:pPr lvl="0"/>
             <a:r>
               <a:rPr/>
-              <a:t>correct type</a:t>
+              <a:t>Is it quantitative or qualitative?</a:t>
             </a:r>
           </a:p>
           <a:p>
             <a:pPr lvl="0"/>
             <a:r>
               <a:rPr/>
-              <a:t>category value labels</a:t>
+              <a:t>Are missing codes declared?</a:t>
             </a:r>
           </a:p>
           <a:p>
             <a:pPr lvl="0"/>
             <a:r>
               <a:rPr/>
-              <a:t>declared missing values</a:t>
+              <a:t>Does its range make sense?</a:t>
+            </a:r>
+          </a:p>
+        </p:txBody>
+      </p:sp>
+    </p:spTree>
+  </p:cSld>
+</p:sld>
+</file>
+
+<file path=ppt/slides/slide5.xml><?xml version="1.0" encoding="utf-8"?>
+<p:sld xmlns:a="http://schemas.openxmlformats.org/drawingml/2006/main" xmlns:r="http://schemas.openxmlformats.org/officeDocument/2006/relationships" xmlns:p="http://schemas.openxmlformats.org/presentationml/2006/main">
+  <p:cSld>
+    <p:spTree>
+      <p:nvGrpSpPr>
+        <p:cNvPr id="1" name=""/>
+        <p:cNvGrpSpPr/>
+        <p:nvPr/>
+      </p:nvGrpSpPr>
+      <p:grpSpPr>
+        <a:xfrm>
+          <a:off x="0" y="0"/>
+          <a:ext cx="0" cy="0"/>
+          <a:chOff x="0" y="0"/>
+          <a:chExt cx="0" cy="0"/>
+        </a:xfrm>
+      </p:grpSpPr>
+      <p:sp>
+        <p:nvSpPr>
+          <p:cNvPr id="2" name="Title 1"/>
+          <p:cNvSpPr>
+            <a:spLocks noGrp="1"/>
+          </p:cNvSpPr>
+          <p:nvPr>
+            <p:ph type="title"/>
+          </p:nvPr>
+        </p:nvSpPr>
+        <p:spPr>
+          <a:xfrm>
+            <a:off x="1097280" y="964692"/>
+            <a:ext cx="9997440" cy="1188720"/>
+          </a:xfrm>
+        </p:spPr>
+        <p:txBody>
+          <a:bodyPr/>
+          <a:lstStyle/>
+          <a:p>
+            <a:pPr lvl="0" indent="0" marL="0">
+              <a:buNone/>
+            </a:pPr>
+            <a:r>
+              <a:rPr/>
+              <a:t>4 Recode with a reason</a:t>
+            </a:r>
+          </a:p>
+        </p:txBody>
+      </p:sp>
+      <p:sp>
+        <p:nvSpPr>
+          <p:cNvPr id="3" name="Content Placeholder 2"/>
+          <p:cNvSpPr>
+            <a:spLocks noGrp="1"/>
+          </p:cNvSpPr>
+          <p:nvPr>
+            <p:ph idx="1"/>
+          </p:nvPr>
+        </p:nvSpPr>
+        <p:spPr/>
+        <p:txBody>
+          <a:bodyPr/>
+          <a:lstStyle/>
+          <a:p>
+            <a:pPr lvl="0" indent="0" marL="0">
+              <a:buNone/>
+            </a:pPr>
+            <a:r>
+              <a:rPr/>
+              <a:t>[Variable selection and recoding]</a:t>
+            </a:r>
+          </a:p>
+          <a:p>
+            <a:pPr lvl="0" indent="0" marL="0">
+              <a:buNone/>
+            </a:pPr>
+            <a:r>
+              <a:rPr b="1"/>
+              <a:t>For this project, qualitative variables need two groups</a:t>
             </a:r>
           </a:p>
           <a:p>
             <a:pPr lvl="0"/>
             <a:r>
               <a:rPr/>
-              <a:t>interpretable range</a:t>
+              <a:t>Discuss any selection or grouping with your TA</a:t>
+            </a:r>
+          </a:p>
+          <a:p>
+            <a:pPr lvl="0"/>
+            <a:r>
+              <a:rPr/>
+              <a:t>Recode into a new variable and keep the original</a:t>
+            </a:r>
+          </a:p>
+          <a:p>
+            <a:pPr lvl="0"/>
+            <a:r>
+              <a:rPr/>
+              <a:t>Label the groups, check frequencies, and save the syntax</a:t>
             </a:r>
           </a:p>
         </p:txBody>
@@ -6321,310 +9021,7 @@
             </a:pPr>
             <a:r>
               <a:rPr/>
-              <a:t>5 Transform only with a reason</a:t>
-            </a:r>
-          </a:p>
-        </p:txBody>
-      </p:sp>
-      <p:pic>
-        <p:nvPicPr>
-          <p:cNvPr descr="Three versions of the same Volkswagen Beetle illustrating that a transformed variable should retain a clear relationship to its source" id="0" name="Picture 1"/>
-          <p:cNvPicPr>
-            <a:picLocks noGrp="1" noChangeAspect="1"/>
-          </p:cNvPicPr>
-          <p:nvPr/>
-        </p:nvPicPr>
-        <p:blipFill>
-          <a:blip r:embed="rId3"/>
-          <a:stretch>
-            <a:fillRect/>
-          </a:stretch>
-        </p:blipFill>
-        <p:spPr bwMode="auto">
-          <a:xfrm>
-            <a:off x="1092200" y="2717800"/>
-            <a:ext cx="4902200" cy="2933700"/>
-          </a:xfrm>
-          <a:prstGeom prst="rect">
-            <a:avLst/>
-          </a:prstGeom>
-          <a:noFill/>
-          <a:ln w="9525">
-            <a:noFill/>
-            <a:headEnd/>
-            <a:tailEnd/>
-          </a:ln>
-        </p:spPr>
-      </p:pic>
-      <p:sp>
-        <p:nvSpPr>
-          <p:cNvPr id="4" name="Content Placeholder 3"/>
-          <p:cNvSpPr>
-            <a:spLocks noGrp="1"/>
-          </p:cNvSpPr>
-          <p:nvPr>
-            <p:ph idx="2" sz="half"/>
-          </p:nvPr>
-        </p:nvSpPr>
-        <p:spPr/>
-        <p:txBody>
-          <a:bodyPr/>
-          <a:lstStyle/>
-          <a:p>
-            <a:pPr lvl="0" indent="-457200" marL="457200">
-              <a:buAutoNum type="arabicPeriod"/>
-            </a:pPr>
-            <a:r>
-              <a:rPr/>
-              <a:t>Define what the new variable represents.</a:t>
-            </a:r>
-          </a:p>
-          <a:p>
-            <a:pPr lvl="0" indent="-457200" marL="457200">
-              <a:buAutoNum type="arabicPeriod"/>
-            </a:pPr>
-            <a:r>
-              <a:rPr/>
-              <a:t>Compute or recode into a </a:t>
-            </a:r>
-            <a:r>
-              <a:rPr b="1"/>
-              <a:t>new</a:t>
-            </a:r>
-            <a:r>
-              <a:rPr/>
-              <a:t> variable.</a:t>
-            </a:r>
-          </a:p>
-          <a:p>
-            <a:pPr lvl="0" indent="-457200" marL="457200">
-              <a:buAutoNum type="arabicPeriod"/>
-            </a:pPr>
-            <a:r>
-              <a:rPr/>
-              <a:t>Add labels.</a:t>
-            </a:r>
-          </a:p>
-          <a:p>
-            <a:pPr lvl="0" indent="-457200" marL="457200">
-              <a:buAutoNum type="arabicPeriod"/>
-            </a:pPr>
-            <a:r>
-              <a:rPr/>
-              <a:t>Run frequencies.</a:t>
-            </a:r>
-          </a:p>
-          <a:p>
-            <a:pPr lvl="0" indent="-457200" marL="457200">
-              <a:buAutoNum type="arabicPeriod"/>
-            </a:pPr>
-            <a:r>
-              <a:rPr/>
-              <a:t>Confirm the result.</a:t>
-            </a:r>
-          </a:p>
-        </p:txBody>
-      </p:sp>
-    </p:spTree>
-  </p:cSld>
-</p:sld>
-</file>
-
-<file path=ppt/slides/slide7.xml><?xml version="1.0" encoding="utf-8"?>
-<p:sld xmlns:a="http://schemas.openxmlformats.org/drawingml/2006/main" xmlns:r="http://schemas.openxmlformats.org/officeDocument/2006/relationships" xmlns:p="http://schemas.openxmlformats.org/presentationml/2006/main">
-  <p:cSld>
-    <p:spTree>
-      <p:nvGrpSpPr>
-        <p:cNvPr id="1" name=""/>
-        <p:cNvGrpSpPr/>
-        <p:nvPr/>
-      </p:nvGrpSpPr>
-      <p:grpSpPr>
-        <a:xfrm>
-          <a:off x="0" y="0"/>
-          <a:ext cx="0" cy="0"/>
-          <a:chOff x="0" y="0"/>
-          <a:chExt cx="0" cy="0"/>
-        </a:xfrm>
-      </p:grpSpPr>
-      <p:sp>
-        <p:nvSpPr>
-          <p:cNvPr id="2" name="Title 1"/>
-          <p:cNvSpPr>
-            <a:spLocks noGrp="1"/>
-          </p:cNvSpPr>
-          <p:nvPr>
-            <p:ph type="title"/>
-          </p:nvPr>
-        </p:nvSpPr>
-        <p:spPr>
-          <a:xfrm>
-            <a:off x="1097280" y="964692"/>
-            <a:ext cx="9997440" cy="1188720"/>
-          </a:xfrm>
-        </p:spPr>
-        <p:txBody>
-          <a:bodyPr/>
-          <a:lstStyle/>
-          <a:p>
-            <a:pPr lvl="0" indent="0" marL="0">
-              <a:buNone/>
-            </a:pPr>
-            <a:r>
-              <a:rPr/>
-              <a:t>6 Write four testable hypotheses</a:t>
-            </a:r>
-          </a:p>
-        </p:txBody>
-      </p:sp>
-      <p:pic>
-        <p:nvPicPr>
-          <p:cNvPr descr="A grid of contestants with different attributes, illustrating a coherent set of distinct comparisons around one central outcome" id="0" name="Picture 1"/>
-          <p:cNvPicPr>
-            <a:picLocks noGrp="1" noChangeAspect="1"/>
-          </p:cNvPicPr>
-          <p:nvPr/>
-        </p:nvPicPr>
-        <p:blipFill>
-          <a:blip r:embed="rId3"/>
-          <a:stretch>
-            <a:fillRect/>
-          </a:stretch>
-        </p:blipFill>
-        <p:spPr bwMode="auto">
-          <a:xfrm>
-            <a:off x="1282700" y="2628900"/>
-            <a:ext cx="4521200" cy="3098800"/>
-          </a:xfrm>
-          <a:prstGeom prst="rect">
-            <a:avLst/>
-          </a:prstGeom>
-          <a:noFill/>
-          <a:ln w="9525">
-            <a:noFill/>
-            <a:headEnd/>
-            <a:tailEnd/>
-          </a:ln>
-        </p:spPr>
-      </p:pic>
-      <p:sp>
-        <p:nvSpPr>
-          <p:cNvPr id="4" name="Content Placeholder 3"/>
-          <p:cNvSpPr>
-            <a:spLocks noGrp="1"/>
-          </p:cNvSpPr>
-          <p:nvPr>
-            <p:ph idx="2" sz="half"/>
-          </p:nvPr>
-        </p:nvSpPr>
-        <p:spPr/>
-        <p:txBody>
-          <a:bodyPr/>
-          <a:lstStyle/>
-          <a:p>
-            <a:pPr lvl="0" indent="0" marL="0">
-              <a:buNone/>
-            </a:pPr>
-            <a:r>
-              <a:rPr/>
-              <a:t>Each hypothesis needs:</a:t>
-            </a:r>
-          </a:p>
-          <a:p>
-            <a:pPr lvl="0"/>
-            <a:r>
-              <a:rPr/>
-              <a:t>the </a:t>
-            </a:r>
-            <a:r>
-              <a:rPr b="1"/>
-              <a:t>core variable</a:t>
-            </a:r>
-          </a:p>
-          <a:p>
-            <a:pPr lvl="0"/>
-            <a:r>
-              <a:rPr/>
-              <a:t>one comparison or predictor</a:t>
-            </a:r>
-          </a:p>
-          <a:p>
-            <a:pPr lvl="0"/>
-            <a:r>
-              <a:rPr/>
-              <a:t>an expected </a:t>
-            </a:r>
-            <a:r>
-              <a:rPr b="1"/>
-              <a:t>direction</a:t>
-            </a:r>
-          </a:p>
-          <a:p>
-            <a:pPr lvl="0"/>
-            <a:r>
-              <a:rPr/>
-              <a:t>relevant population or context</a:t>
-            </a:r>
-          </a:p>
-          <a:p>
-            <a:pPr lvl="0" indent="0" marL="0">
-              <a:buNone/>
-            </a:pPr>
-            <a:r>
-              <a:rPr/>
-              <a:t>One variable. Four relationships.</a:t>
-            </a:r>
-          </a:p>
-        </p:txBody>
-      </p:sp>
-    </p:spTree>
-  </p:cSld>
-</p:sld>
-</file>
-
-<file path=ppt/slides/slide8.xml><?xml version="1.0" encoding="utf-8"?>
-<p:sld xmlns:a="http://schemas.openxmlformats.org/drawingml/2006/main" xmlns:r="http://schemas.openxmlformats.org/officeDocument/2006/relationships" xmlns:p="http://schemas.openxmlformats.org/presentationml/2006/main">
-  <p:cSld>
-    <p:spTree>
-      <p:nvGrpSpPr>
-        <p:cNvPr id="1" name=""/>
-        <p:cNvGrpSpPr/>
-        <p:nvPr/>
-      </p:nvGrpSpPr>
-      <p:grpSpPr>
-        <a:xfrm>
-          <a:off x="0" y="0"/>
-          <a:ext cx="0" cy="0"/>
-          <a:chOff x="0" y="0"/>
-          <a:chExt cx="0" cy="0"/>
-        </a:xfrm>
-      </p:grpSpPr>
-      <p:sp>
-        <p:nvSpPr>
-          <p:cNvPr id="2" name="Title 1"/>
-          <p:cNvSpPr>
-            <a:spLocks noGrp="1"/>
-          </p:cNvSpPr>
-          <p:nvPr>
-            <p:ph type="title"/>
-          </p:nvPr>
-        </p:nvSpPr>
-        <p:spPr>
-          <a:xfrm>
-            <a:off x="1097280" y="964692"/>
-            <a:ext cx="9997440" cy="1188720"/>
-          </a:xfrm>
-        </p:spPr>
-        <p:txBody>
-          <a:bodyPr/>
-          <a:lstStyle/>
-          <a:p>
-            <a:pPr lvl="0" indent="0" marL="0">
-              <a:buNone/>
-            </a:pPr>
-            <a:r>
-              <a:rPr/>
-              <a:t>7 Match language to variables</a:t>
+              <a:t>5 Choose the test for the question</a:t>
             </a:r>
           </a:p>
         </p:txBody>
@@ -6664,7 +9061,7 @@
                       </a:pPr>
                       <a:r>
                         <a:rPr/>
-                        <a:t>Variable pattern</a:t>
+                        <a:t>What are you asking about?</a:t>
                       </a:r>
                     </a:p>
                   </a:txBody>
@@ -6680,7 +9077,7 @@
                       </a:pPr>
                       <a:r>
                         <a:rPr/>
-                        <a:t>Say what should happen</a:t>
+                        <a:t>Test</a:t>
                       </a:r>
                     </a:p>
                   </a:txBody>
@@ -6698,7 +9095,7 @@
                       </a:pPr>
                       <a:r>
                         <a:rPr/>
-                        <a:t>Two quantitative</a:t>
+                        <a:t>Linear association between two quantitative variables</a:t>
                       </a:r>
                     </a:p>
                   </a:txBody>
@@ -6713,7 +9110,11 @@
                       </a:pPr>
                       <a:r>
                         <a:rPr/>
-                        <a:t>Higher values relate to higher or lower values.</a:t>
+                        <a:t>Pearson’s </a:t>
+                      </a:r>
+                      <a:r>
+                        <a:rPr i="1"/>
+                        <a:t>r</a:t>
                       </a:r>
                     </a:p>
                   </a:txBody>
@@ -6730,7 +9131,7 @@
                       </a:pPr>
                       <a:r>
                         <a:rPr/>
-                        <a:t>Quantitative + binary</a:t>
+                        <a:t>Association between two binary variables</a:t>
                       </a:r>
                     </a:p>
                   </a:txBody>
@@ -6745,7 +9146,7 @@
                       </a:pPr>
                       <a:r>
                         <a:rPr/>
-                        <a:t>One group has a higher or lower mean.</a:t>
+                        <a:t>2 × 2 χ²</a:t>
                       </a:r>
                     </a:p>
                   </a:txBody>
@@ -6762,7 +9163,7 @@
                       </a:pPr>
                       <a:r>
                         <a:rPr/>
-                        <a:t>Two categorical</a:t>
+                        <a:t>A quantitative mean across two independent groups</a:t>
                       </a:r>
                     </a:p>
                   </a:txBody>
@@ -6777,7 +9178,7 @@
                       </a:pPr>
                       <a:r>
                         <a:rPr/>
-                        <a:t>One category is more or less likely.</a:t>
+                        <a:t>2BG ANOVA</a:t>
                       </a:r>
                     </a:p>
                   </a:txBody>
@@ -6794,7 +9195,7 @@
                       </a:pPr>
                       <a:r>
                         <a:rPr/>
-                        <a:t>Qualitative variable with 3+ groups</a:t>
+                        <a:t>Two comparable quantitative means from the same participants</a:t>
                       </a:r>
                     </a:p>
                   </a:txBody>
@@ -6809,7 +9210,300 @@
                       </a:pPr>
                       <a:r>
                         <a:rPr/>
-                        <a:t>Select or recode it into two defensible groups before writing the RH.</a:t>
+                        <a:t>2WG ANOVA</a:t>
+                      </a:r>
+                    </a:p>
+                  </a:txBody>
+                </a:tc>
+              </a:tr>
+            </a:tbl>
+          </a:graphicData>
+        </a:graphic>
+      </p:graphicFrame>
+    </p:spTree>
+  </p:cSld>
+</p:sld>
+</file>
+
+<file path=ppt/slides/slide7.xml><?xml version="1.0" encoding="utf-8"?>
+<p:sld xmlns:a="http://schemas.openxmlformats.org/drawingml/2006/main" xmlns:r="http://schemas.openxmlformats.org/officeDocument/2006/relationships" xmlns:p="http://schemas.openxmlformats.org/presentationml/2006/main">
+  <p:cSld>
+    <p:spTree>
+      <p:nvGrpSpPr>
+        <p:cNvPr id="1" name=""/>
+        <p:cNvGrpSpPr/>
+        <p:nvPr/>
+      </p:nvGrpSpPr>
+      <p:grpSpPr>
+        <a:xfrm>
+          <a:off x="0" y="0"/>
+          <a:ext cx="0" cy="0"/>
+          <a:chOff x="0" y="0"/>
+          <a:chExt cx="0" cy="0"/>
+        </a:xfrm>
+      </p:grpSpPr>
+      <p:sp>
+        <p:nvSpPr>
+          <p:cNvPr id="2" name="Title 1"/>
+          <p:cNvSpPr>
+            <a:spLocks noGrp="1"/>
+          </p:cNvSpPr>
+          <p:nvPr>
+            <p:ph type="title"/>
+          </p:nvPr>
+        </p:nvSpPr>
+        <p:spPr>
+          <a:xfrm>
+            <a:off x="1097280" y="964692"/>
+            <a:ext cx="9997440" cy="1188720"/>
+          </a:xfrm>
+        </p:spPr>
+        <p:txBody>
+          <a:bodyPr/>
+          <a:lstStyle/>
+          <a:p>
+            <a:pPr lvl="0" indent="0" marL="0">
+              <a:buNone/>
+            </a:pPr>
+            <a:r>
+              <a:rPr/>
+              <a:t>6 Open the Superman practice data</a:t>
+            </a:r>
+          </a:p>
+        </p:txBody>
+      </p:sp>
+      <p:sp>
+        <p:nvSpPr>
+          <p:cNvPr id="3" name="Content Placeholder 2"/>
+          <p:cNvSpPr>
+            <a:spLocks noGrp="1"/>
+          </p:cNvSpPr>
+          <p:nvPr>
+            <p:ph idx="1"/>
+          </p:nvPr>
+        </p:nvSpPr>
+        <p:spPr/>
+        <p:txBody>
+          <a:bodyPr/>
+          <a:lstStyle/>
+          <a:p>
+            <a:pPr lvl="0" indent="0" marL="0">
+              <a:buNone/>
+            </a:pPr>
+            <a:r>
+              <a:rPr/>
+              <a:t>Use these names in SPSS Variable View</a:t>
+            </a:r>
+          </a:p>
+        </p:txBody>
+      </p:sp>
+    </p:spTree>
+  </p:cSld>
+</p:sld>
+</file>
+
+<file path=ppt/slides/slide8.xml><?xml version="1.0" encoding="utf-8"?>
+<p:sld xmlns:a="http://schemas.openxmlformats.org/drawingml/2006/main" xmlns:r="http://schemas.openxmlformats.org/officeDocument/2006/relationships" xmlns:p="http://schemas.openxmlformats.org/presentationml/2006/main">
+  <p:cSld>
+    <p:spTree>
+      <p:nvGrpSpPr>
+        <p:cNvPr id="1" name=""/>
+        <p:cNvGrpSpPr/>
+        <p:nvPr/>
+      </p:nvGrpSpPr>
+      <p:grpSpPr>
+        <a:xfrm>
+          <a:off x="0" y="0"/>
+          <a:ext cx="0" cy="0"/>
+          <a:chOff x="0" y="0"/>
+          <a:chExt cx="0" cy="0"/>
+        </a:xfrm>
+      </p:grpSpPr>
+      <p:sp>
+        <p:nvSpPr>
+          <p:cNvPr id="2" name="Title 1"/>
+          <p:cNvSpPr>
+            <a:spLocks noGrp="1"/>
+          </p:cNvSpPr>
+          <p:nvPr>
+            <p:ph type="title"/>
+          </p:nvPr>
+        </p:nvSpPr>
+        <p:spPr>
+          <a:xfrm>
+            <a:off x="1097280" y="964692"/>
+            <a:ext cx="9997440" cy="1188720"/>
+          </a:xfrm>
+        </p:spPr>
+        <p:txBody>
+          <a:bodyPr/>
+          <a:lstStyle/>
+          <a:p>
+            <a:pPr lvl="0" indent="0" marL="0">
+              <a:buNone/>
+            </a:pPr>
+            <a:r>
+              <a:rPr/>
+              <a:t>6 Open the Superman practice data (continued)</a:t>
+            </a:r>
+          </a:p>
+        </p:txBody>
+      </p:sp>
+      <p:graphicFrame>
+        <p:nvGraphicFramePr>
+          <p:cNvPr id="6" name="Content Placeholder 5"/>
+          <p:cNvGraphicFramePr>
+            <a:graphicFrameLocks noGrp="1"/>
+          </p:cNvGraphicFramePr>
+          <p:nvPr>
+            <p:ph idx="1"/>
+          </p:nvPr>
+        </p:nvGraphicFramePr>
+        <p:xfrm>
+          <a:off x="1092200" y="2628900"/>
+          <a:ext cx="9994900" cy="3098800"/>
+        </p:xfrm>
+        <a:graphic>
+          <a:graphicData uri="http://schemas.openxmlformats.org/drawingml/2006/table">
+            <a:tbl>
+              <a:tblPr firstRow="1" bandRow="1">
+                <a:tableStyleId>{5C22544A-7EE6-4342-B048-85BDC9FD1C3A}</a:tableStyleId>
+              </a:tblPr>
+              <a:tblGrid>
+                <a:gridCol w="4991100"/>
+                <a:gridCol w="4991100"/>
+              </a:tblGrid>
+              <a:tr h="0">
+                <a:tc>
+                  <a:txBody>
+                    <a:bodyPr/>
+                    <a:lstStyle/>
+                    <a:p>
+                      <a:pPr lvl="0" indent="0" marL="0">
+                        <a:buNone/>
+                      </a:pPr>
+                      <a:r>
+                        <a:rPr/>
+                        <a:t>Variable in SPSS</a:t>
+                      </a:r>
+                    </a:p>
+                  </a:txBody>
+                  <a:tcPr/>
+                </a:tc>
+                <a:tc>
+                  <a:txBody>
+                    <a:bodyPr/>
+                    <a:lstStyle/>
+                    <a:p>
+                      <a:pPr lvl="0" indent="0" marL="0">
+                        <a:buNone/>
+                      </a:pPr>
+                      <a:r>
+                        <a:rPr/>
+                        <a:t>Description</a:t>
+                      </a:r>
+                    </a:p>
+                  </a:txBody>
+                  <a:tcPr/>
+                </a:tc>
+              </a:tr>
+              <a:tr h="0">
+                <a:tc>
+                  <a:txBody>
+                    <a:bodyPr/>
+                    <a:lstStyle/>
+                    <a:p>
+                      <a:pPr lvl="0" indent="0" marL="0">
+                        <a:buNone/>
+                      </a:pPr>
+                      <a:r>
+                        <a:rPr>
+                          <a:latin typeface="Courier"/>
+                        </a:rPr>
+                        <a:t>clark_grp</a:t>
+                      </a:r>
+                    </a:p>
+                  </a:txBody>
+                </a:tc>
+                <a:tc>
+                  <a:txBody>
+                    <a:bodyPr/>
+                    <a:lstStyle/>
+                    <a:p>
+                      <a:pPr lvl="0" indent="0" marL="0">
+                        <a:buNone/>
+                      </a:pPr>
+                      <a:r>
+                        <a:rPr/>
+                        <a:t>Clark actor: below 6 ft (1); 6 ft or taller (2)</a:t>
+                      </a:r>
+                    </a:p>
+                  </a:txBody>
+                </a:tc>
+              </a:tr>
+              <a:tr h="0">
+                <a:tc>
+                  <a:txBody>
+                    <a:bodyPr/>
+                    <a:lstStyle/>
+                    <a:p>
+                      <a:pPr lvl="0" indent="0" marL="0">
+                        <a:buNone/>
+                      </a:pPr>
+                      <a:r>
+                        <a:rPr>
+                          <a:latin typeface="Courier"/>
+                        </a:rPr>
+                        <a:t>tomatometer</a:t>
+                      </a:r>
+                    </a:p>
+                  </a:txBody>
+                </a:tc>
+                <a:tc>
+                  <a:txBody>
+                    <a:bodyPr/>
+                    <a:lstStyle/>
+                    <a:p>
+                      <a:pPr lvl="0" indent="0" marL="0">
+                        <a:buNone/>
+                      </a:pPr>
+                      <a:r>
+                        <a:rPr/>
+                        <a:t>Rotten Tomatoes category: Rotten (1); Fresh (2)</a:t>
+                      </a:r>
+                    </a:p>
+                  </a:txBody>
+                </a:tc>
+              </a:tr>
+              <a:tr h="0">
+                <a:tc>
+                  <a:txBody>
+                    <a:bodyPr/>
+                    <a:lstStyle/>
+                    <a:p>
+                      <a:pPr lvl="0" indent="0" marL="0">
+                        <a:buNone/>
+                      </a:pPr>
+                      <a:r>
+                        <a:rPr>
+                          <a:latin typeface="Courier"/>
+                        </a:rPr>
+                        <a:t>clark_height_in</a:t>
+                      </a:r>
+                    </a:p>
+                  </a:txBody>
+                </a:tc>
+                <a:tc>
+                  <a:txBody>
+                    <a:bodyPr/>
+                    <a:lstStyle/>
+                    <a:p>
+                      <a:pPr lvl="0" indent="0" marL="0">
+                        <a:buNone/>
+                      </a:pPr>
+                      <a:r>
+                        <a:rPr/>
+                        <a:t>Clark Kent/Superman actor height, in inches</a:t>
                       </a:r>
                     </a:p>
                   </a:txBody>
@@ -6866,75 +9560,14 @@
             </a:pPr>
             <a:r>
               <a:rPr/>
-              <a:t>8 Predict before checking the data</a:t>
-            </a:r>
-          </a:p>
-        </p:txBody>
-      </p:sp>
-      <p:sp>
-        <p:nvSpPr>
-          <p:cNvPr id="3" name="Content Placeholder 2"/>
-          <p:cNvSpPr>
-            <a:spLocks noGrp="1"/>
-          </p:cNvSpPr>
-          <p:nvPr>
-            <p:ph idx="1" sz="half"/>
-          </p:nvPr>
-        </p:nvSpPr>
-        <p:spPr/>
-        <p:txBody>
-          <a:bodyPr/>
-          <a:lstStyle/>
-          <a:p>
-            <a:pPr lvl="0" indent="0" marL="0">
-              <a:buNone/>
-            </a:pPr>
-            <a:r>
-              <a:rPr/>
-              <a:t>The RH should come from:</a:t>
-            </a:r>
-          </a:p>
-          <a:p>
-            <a:pPr lvl="0" indent="-457200" marL="457200">
-              <a:buAutoNum type="arabicPeriod"/>
-            </a:pPr>
-            <a:r>
-              <a:rPr/>
-              <a:t>theory</a:t>
-            </a:r>
-          </a:p>
-          <a:p>
-            <a:pPr lvl="0" indent="-457200" marL="457200">
-              <a:buAutoNum type="arabicPeriod"/>
-            </a:pPr>
-            <a:r>
-              <a:rPr/>
-              <a:t>prior research</a:t>
-            </a:r>
-          </a:p>
-          <a:p>
-            <a:pPr lvl="0" indent="-457200" marL="457200">
-              <a:buAutoNum type="arabicPeriod"/>
-            </a:pPr>
-            <a:r>
-              <a:rPr/>
-              <a:t>a defensible conceptual rationale</a:t>
-            </a:r>
-          </a:p>
-          <a:p>
-            <a:pPr lvl="0" indent="0" marL="0">
-              <a:buNone/>
-            </a:pPr>
-            <a:r>
-              <a:rPr/>
-              <a:t>Write the prediction before looking for a favorable p value.</a:t>
+              <a:t>7 Read the Lois height variable</a:t>
             </a:r>
           </a:p>
         </p:txBody>
       </p:sp>
       <p:pic>
         <p:nvPicPr>
-          <p:cNvPr descr="A statistics meme about not understanding a p value, reinforcing that an observed p value is not a substitute for a justified prediction" id="0" name="Picture 1"/>
+          <p:cNvPr descr="Lab 02 illustration of Lois Lane beside a height scale, labeled Lois height in inches" id="0" name="Picture 1"/>
           <p:cNvPicPr>
             <a:picLocks noGrp="1" noChangeAspect="1"/>
           </p:cNvPicPr>
@@ -6948,8 +9581,8 @@
         </p:blipFill>
         <p:spPr bwMode="auto">
           <a:xfrm>
-            <a:off x="7061200" y="2628900"/>
-            <a:ext cx="3162300" cy="3098800"/>
+            <a:off x="1993900" y="2628900"/>
+            <a:ext cx="3098800" cy="3098800"/>
           </a:xfrm>
           <a:prstGeom prst="rect">
             <a:avLst/>
@@ -6962,6 +9595,60 @@
           </a:ln>
         </p:spPr>
       </p:pic>
+      <p:sp>
+        <p:nvSpPr>
+          <p:cNvPr id="4" name="Content Placeholder 3"/>
+          <p:cNvSpPr>
+            <a:spLocks noGrp="1"/>
+          </p:cNvSpPr>
+          <p:nvPr>
+            <p:ph idx="2" sz="half"/>
+          </p:nvPr>
+        </p:nvSpPr>
+        <p:spPr/>
+        <p:txBody>
+          <a:bodyPr/>
+          <a:lstStyle/>
+          <a:p>
+            <a:pPr lvl="0" indent="0" marL="0">
+              <a:buNone/>
+            </a:pPr>
+            <a:r>
+              <a:rPr>
+                <a:latin typeface="Courier"/>
+              </a:rPr>
+              <a:t>lois_height_in</a:t>
+            </a:r>
+          </a:p>
+          <a:p>
+            <a:pPr lvl="0" indent="0" marL="0">
+              <a:buNone/>
+            </a:pPr>
+            <a:r>
+              <a:rPr b="1"/>
+              <a:t>Description</a:t>
+            </a:r>
+          </a:p>
+          <a:p>
+            <a:pPr lvl="0" indent="0" marL="0">
+              <a:buNone/>
+            </a:pPr>
+            <a:r>
+              <a:rPr/>
+              <a:t>Lois Lane actor height, in inches</a:t>
+            </a:r>
+          </a:p>
+          <a:p>
+            <a:pPr lvl="0" indent="0" marL="0">
+              <a:buNone/>
+            </a:pPr>
+            <a:r>
+              <a:rPr/>
+              <a:t>[Quiz label: Lois height]</a:t>
+            </a:r>
+          </a:p>
+        </p:txBody>
+      </p:sp>
     </p:spTree>
   </p:cSld>
 </p:sld>
